--- a/Gurgaon_RealEstate_Presentation.pptx
+++ b/Gurgaon_RealEstate_Presentation.pptx
@@ -5,7 +5,7 @@
     <p:sldMasterId id="2147483648" r:id="rId1"/>
   </p:sldMasterIdLst>
   <p:notesMasterIdLst>
-    <p:notesMasterId r:id="rId13"/>
+    <p:notesMasterId r:id="rId17"/>
   </p:notesMasterIdLst>
   <p:sldIdLst>
     <p:sldId id="268" r:id="rId2"/>
@@ -15,15 +15,19 @@
     <p:sldId id="260" r:id="rId6"/>
     <p:sldId id="261" r:id="rId7"/>
     <p:sldId id="262" r:id="rId8"/>
-    <p:sldId id="263" r:id="rId9"/>
-    <p:sldId id="264" r:id="rId10"/>
-    <p:sldId id="265" r:id="rId11"/>
-    <p:sldId id="266" r:id="rId12"/>
+    <p:sldId id="269" r:id="rId9"/>
+    <p:sldId id="270" r:id="rId10"/>
+    <p:sldId id="271" r:id="rId11"/>
+    <p:sldId id="272" r:id="rId12"/>
+    <p:sldId id="263" r:id="rId13"/>
+    <p:sldId id="264" r:id="rId14"/>
+    <p:sldId id="265" r:id="rId15"/>
+    <p:sldId id="266" r:id="rId16"/>
   </p:sldIdLst>
   <p:sldSz cx="9144000" cy="5143500" type="screen16x9"/>
   <p:notesSz cx="5143500" cy="9144000"/>
   <p:custDataLst>
-    <p:tags r:id="rId14"/>
+    <p:tags r:id="rId18"/>
   </p:custDataLst>
   <p:defaultTextStyle>
     <a:lvl1pPr marL="0" algn="l" defTabSz="914400" rtl="0" eaLnBrk="1" latinLnBrk="0" hangingPunct="1">
@@ -424,7 +428,7 @@
           <a:p>
             <a:fld id="{F7021451-1387-4CA6-816F-3879F97B5CBC}" type="slidenum">
               <a:rPr lang="en-US"/>
-              <a:t>10</a:t>
+              <a:t>14</a:t>
             </a:fld>
             <a:endParaRPr lang="en-US"/>
           </a:p>
@@ -508,7 +512,7 @@
           <a:p>
             <a:fld id="{F7021451-1387-4CA6-816F-3879F97B5CBC}" type="slidenum">
               <a:rPr lang="en-US"/>
-              <a:t>11</a:t>
+              <a:t>15</a:t>
             </a:fld>
             <a:endParaRPr lang="en-US"/>
           </a:p>
@@ -1096,7 +1100,7 @@
           <a:p>
             <a:fld id="{F7021451-1387-4CA6-816F-3879F97B5CBC}" type="slidenum">
               <a:rPr lang="en-US"/>
-              <a:t>8</a:t>
+              <a:t>12</a:t>
             </a:fld>
             <a:endParaRPr lang="en-US"/>
           </a:p>
@@ -1180,7 +1184,7 @@
           <a:p>
             <a:fld id="{F7021451-1387-4CA6-816F-3879F97B5CBC}" type="slidenum">
               <a:rPr lang="en-US"/>
-              <a:t>9</a:t>
+              <a:t>13</a:t>
             </a:fld>
             <a:endParaRPr lang="en-US"/>
           </a:p>
@@ -2958,10 +2962,10 @@
             </a:pathLst>
           </a:custGeom>
           <a:blipFill>
-            <a:blip r:embed="rId4">
+            <a:blip>
               <a:extLst>
                 <a:ext uri="{96DAC541-7B7A-43D3-8B79-37D633B846F1}">
-                  <asvg:svgBlip xmlns:asvg="http://schemas.microsoft.com/office/drawing/2016/SVG/main" r:embed="rId5"/>
+                  <asvg:svgBlip xmlns:asvg="http://schemas.microsoft.com/office/drawing/2016/SVG/main" r:embed="rId4"/>
                 </a:ext>
               </a:extLst>
             </a:blip>
@@ -3023,10 +3027,10 @@
             </a:pathLst>
           </a:custGeom>
           <a:blipFill>
-            <a:blip r:embed="rId4">
+            <a:blip>
               <a:extLst>
                 <a:ext uri="{96DAC541-7B7A-43D3-8B79-37D633B846F1}">
-                  <asvg:svgBlip xmlns:asvg="http://schemas.microsoft.com/office/drawing/2016/SVG/main" r:embed="rId5"/>
+                  <asvg:svgBlip xmlns:asvg="http://schemas.microsoft.com/office/drawing/2016/SVG/main" r:embed="rId4"/>
                 </a:ext>
               </a:extLst>
             </a:blip>
@@ -3088,10 +3092,10 @@
             </a:pathLst>
           </a:custGeom>
           <a:blipFill>
-            <a:blip r:embed="rId4">
+            <a:blip>
               <a:extLst>
                 <a:ext uri="{96DAC541-7B7A-43D3-8B79-37D633B846F1}">
-                  <asvg:svgBlip xmlns:asvg="http://schemas.microsoft.com/office/drawing/2016/SVG/main" r:embed="rId5"/>
+                  <asvg:svgBlip xmlns:asvg="http://schemas.microsoft.com/office/drawing/2016/SVG/main" r:embed="rId4"/>
                 </a:ext>
               </a:extLst>
             </a:blip>
@@ -3408,7 +3412,7 @@
           <p:nvPr/>
         </p:nvPicPr>
         <p:blipFill>
-          <a:blip r:embed="rId6"/>
+          <a:blip r:embed="rId5"/>
           <a:srcRect l="26757" t="2453" r="27842" b="53701"/>
           <a:stretch>
             <a:fillRect/>
@@ -3530,7 +3534,7 @@
           <p:nvPr/>
         </p:nvPicPr>
         <p:blipFill>
-          <a:blip r:embed="rId6"/>
+          <a:blip r:embed="rId5"/>
           <a:srcRect l="26859" t="52379" r="26874" b="2349"/>
           <a:stretch>
             <a:fillRect/>
@@ -3673,7 +3677,7 @@
           <p:nvPr/>
         </p:nvPicPr>
         <p:blipFill>
-          <a:blip r:embed="rId7"/>
+          <a:blip r:embed="rId6"/>
           <a:srcRect l="28109" t="6546" r="28551" b="49509"/>
           <a:stretch>
             <a:fillRect/>
@@ -3724,7 +3728,7 @@
             <p:nvPr/>
           </p:nvPicPr>
           <p:blipFill>
-            <a:blip r:embed="rId8"/>
+            <a:blip r:embed="rId7"/>
             <a:stretch>
               <a:fillRect/>
             </a:stretch>
@@ -3754,7 +3758,7 @@
             <p:nvPr/>
           </p:nvPicPr>
           <p:blipFill>
-            <a:blip r:embed="rId9"/>
+            <a:blip r:embed="rId8"/>
             <a:stretch>
               <a:fillRect/>
             </a:stretch>
@@ -3917,7 +3921,7 @@
           <p:nvPr/>
         </p:nvPicPr>
         <p:blipFill>
-          <a:blip r:embed="rId10"/>
+          <a:blip r:embed="rId9"/>
           <a:srcRect b="19729"/>
           <a:stretch>
             <a:fillRect/>
@@ -3951,6 +3955,733 @@
 
 <file path=ppt/slides/slide10.xml><?xml version="1.0" encoding="utf-8"?>
 <p:sld xmlns:a="http://schemas.openxmlformats.org/drawingml/2006/main" xmlns:r="http://schemas.openxmlformats.org/officeDocument/2006/relationships" xmlns:p="http://schemas.openxmlformats.org/presentationml/2006/main">
+  <p:cSld>
+    <p:spTree>
+      <p:nvGrpSpPr>
+        <p:cNvPr id="1" name=""/>
+        <p:cNvGrpSpPr/>
+        <p:nvPr/>
+      </p:nvGrpSpPr>
+      <p:grpSpPr>
+        <a:xfrm>
+          <a:off x="0" y="0"/>
+          <a:ext cx="0" cy="0"/>
+          <a:chOff x="0" y="0"/>
+          <a:chExt cx="0" cy="0"/>
+        </a:xfrm>
+      </p:grpSpPr>
+      <p:pic>
+        <p:nvPicPr>
+          <p:cNvPr id="3" name="Picture 2">
+            <a:extLst>
+              <a:ext uri="{FF2B5EF4-FFF2-40B4-BE49-F238E27FC236}">
+                <a16:creationId xmlns:a16="http://schemas.microsoft.com/office/drawing/2014/main" id="{246ADC06-ADCB-0833-C192-81C93AFD495A}"/>
+              </a:ext>
+            </a:extLst>
+          </p:cNvPr>
+          <p:cNvPicPr>
+            <a:picLocks noChangeAspect="1"/>
+          </p:cNvPicPr>
+          <p:nvPr/>
+        </p:nvPicPr>
+        <p:blipFill>
+          <a:blip r:embed="rId2"/>
+          <a:stretch>
+            <a:fillRect/>
+          </a:stretch>
+        </p:blipFill>
+        <p:spPr>
+          <a:xfrm>
+            <a:off x="501645" y="382077"/>
+            <a:ext cx="8013248" cy="4621748"/>
+          </a:xfrm>
+          <a:prstGeom prst="rect">
+            <a:avLst/>
+          </a:prstGeom>
+        </p:spPr>
+      </p:pic>
+    </p:spTree>
+    <p:extLst>
+      <p:ext uri="{BB962C8B-B14F-4D97-AF65-F5344CB8AC3E}">
+        <p14:creationId xmlns:p14="http://schemas.microsoft.com/office/powerpoint/2010/main" val="1697229090"/>
+      </p:ext>
+    </p:extLst>
+  </p:cSld>
+  <p:clrMapOvr>
+    <a:masterClrMapping/>
+  </p:clrMapOvr>
+</p:sld>
+</file>
+
+<file path=ppt/slides/slide11.xml><?xml version="1.0" encoding="utf-8"?>
+<p:sld xmlns:a="http://schemas.openxmlformats.org/drawingml/2006/main" xmlns:r="http://schemas.openxmlformats.org/officeDocument/2006/relationships" xmlns:p="http://schemas.openxmlformats.org/presentationml/2006/main">
+  <p:cSld>
+    <p:spTree>
+      <p:nvGrpSpPr>
+        <p:cNvPr id="1" name=""/>
+        <p:cNvGrpSpPr/>
+        <p:nvPr/>
+      </p:nvGrpSpPr>
+      <p:grpSpPr>
+        <a:xfrm>
+          <a:off x="0" y="0"/>
+          <a:ext cx="0" cy="0"/>
+          <a:chOff x="0" y="0"/>
+          <a:chExt cx="0" cy="0"/>
+        </a:xfrm>
+      </p:grpSpPr>
+      <p:pic>
+        <p:nvPicPr>
+          <p:cNvPr id="3" name="Picture 2">
+            <a:extLst>
+              <a:ext uri="{FF2B5EF4-FFF2-40B4-BE49-F238E27FC236}">
+                <a16:creationId xmlns:a16="http://schemas.microsoft.com/office/drawing/2014/main" id="{E7716815-82BC-059F-67B8-0967AD06AA8B}"/>
+              </a:ext>
+            </a:extLst>
+          </p:cNvPr>
+          <p:cNvPicPr>
+            <a:picLocks noChangeAspect="1"/>
+          </p:cNvPicPr>
+          <p:nvPr/>
+        </p:nvPicPr>
+        <p:blipFill>
+          <a:blip r:embed="rId2"/>
+          <a:stretch>
+            <a:fillRect/>
+          </a:stretch>
+        </p:blipFill>
+        <p:spPr>
+          <a:xfrm>
+            <a:off x="449193" y="404303"/>
+            <a:ext cx="8221171" cy="4657815"/>
+          </a:xfrm>
+          <a:prstGeom prst="rect">
+            <a:avLst/>
+          </a:prstGeom>
+        </p:spPr>
+      </p:pic>
+    </p:spTree>
+    <p:extLst>
+      <p:ext uri="{BB962C8B-B14F-4D97-AF65-F5344CB8AC3E}">
+        <p14:creationId xmlns:p14="http://schemas.microsoft.com/office/powerpoint/2010/main" val="1884703805"/>
+      </p:ext>
+    </p:extLst>
+  </p:cSld>
+  <p:clrMapOvr>
+    <a:masterClrMapping/>
+  </p:clrMapOvr>
+</p:sld>
+</file>
+
+<file path=ppt/slides/slide12.xml><?xml version="1.0" encoding="utf-8"?>
+<p:sld xmlns:a="http://schemas.openxmlformats.org/drawingml/2006/main" xmlns:r="http://schemas.openxmlformats.org/officeDocument/2006/relationships" xmlns:p="http://schemas.openxmlformats.org/presentationml/2006/main">
+  <p:cSld name="Slide 8">
+    <p:bg>
+      <p:bgPr>
+        <a:solidFill>
+          <a:srgbClr val="FFFFFF"/>
+        </a:solidFill>
+        <a:effectLst/>
+      </p:bgPr>
+    </p:bg>
+    <p:spTree>
+      <p:nvGrpSpPr>
+        <p:cNvPr id="1" name=""/>
+        <p:cNvGrpSpPr/>
+        <p:nvPr/>
+      </p:nvGrpSpPr>
+      <p:grpSpPr>
+        <a:xfrm>
+          <a:off x="0" y="0"/>
+          <a:ext cx="0" cy="0"/>
+          <a:chOff x="0" y="0"/>
+          <a:chExt cx="0" cy="0"/>
+        </a:xfrm>
+      </p:grpSpPr>
+      <p:sp>
+        <p:nvSpPr>
+          <p:cNvPr id="4" name="Text 2"/>
+          <p:cNvSpPr/>
+          <p:nvPr/>
+        </p:nvSpPr>
+        <p:spPr>
+          <a:xfrm>
+            <a:off x="320040" y="621792"/>
+            <a:ext cx="8229600" cy="438912"/>
+          </a:xfrm>
+          <a:prstGeom prst="rect">
+            <a:avLst/>
+          </a:prstGeom>
+          <a:noFill/>
+          <a:ln/>
+        </p:spPr>
+        <p:txBody>
+          <a:bodyPr wrap="square" rtlCol="0" anchor="ctr"/>
+          <a:lstStyle/>
+          <a:p>
+            <a:pPr marL="0" indent="0">
+              <a:buNone/>
+            </a:pPr>
+            <a:r>
+              <a:rPr lang="en-US" sz="2200" b="1" dirty="0">
+                <a:solidFill>
+                  <a:srgbClr val="1B3A8A"/>
+                </a:solidFill>
+                <a:latin typeface="Calibri" pitchFamily="34" charset="0"/>
+                <a:ea typeface="Calibri" pitchFamily="34" charset="-122"/>
+                <a:cs typeface="Calibri" pitchFamily="34" charset="-120"/>
+              </a:rPr>
+              <a:t>Video of Project Demo</a:t>
+            </a:r>
+            <a:endParaRPr lang="en-US" sz="2200" dirty="0"/>
+          </a:p>
+        </p:txBody>
+      </p:sp>
+      <p:sp>
+        <p:nvSpPr>
+          <p:cNvPr id="6" name="Shape 4"/>
+          <p:cNvSpPr/>
+          <p:nvPr/>
+        </p:nvSpPr>
+        <p:spPr>
+          <a:xfrm>
+            <a:off x="365760" y="685800"/>
+            <a:ext cx="8412480" cy="3977640"/>
+          </a:xfrm>
+          <a:prstGeom prst="rect">
+            <a:avLst/>
+          </a:prstGeom>
+          <a:solidFill>
+            <a:srgbClr val="ECEFF1"/>
+          </a:solidFill>
+          <a:ln w="25400">
+            <a:solidFill>
+              <a:srgbClr val="1B3A8A"/>
+            </a:solidFill>
+            <a:prstDash val="solid"/>
+          </a:ln>
+        </p:spPr>
+        <p:txBody>
+          <a:bodyPr/>
+          <a:lstStyle/>
+          <a:p>
+            <a:endParaRPr lang="en-IN"/>
+          </a:p>
+        </p:txBody>
+      </p:sp>
+      <p:sp>
+        <p:nvSpPr>
+          <p:cNvPr id="7" name="Shape 5"/>
+          <p:cNvSpPr/>
+          <p:nvPr/>
+        </p:nvSpPr>
+        <p:spPr>
+          <a:xfrm>
+            <a:off x="365760" y="685800"/>
+            <a:ext cx="8412480" cy="384048"/>
+          </a:xfrm>
+          <a:prstGeom prst="rect">
+            <a:avLst/>
+          </a:prstGeom>
+          <a:solidFill>
+            <a:srgbClr val="E0E0E0"/>
+          </a:solidFill>
+          <a:ln/>
+        </p:spPr>
+        <p:txBody>
+          <a:bodyPr/>
+          <a:lstStyle/>
+          <a:p>
+            <a:endParaRPr lang="en-IN"/>
+          </a:p>
+        </p:txBody>
+      </p:sp>
+      <p:sp>
+        <p:nvSpPr>
+          <p:cNvPr id="8" name="Shape 6"/>
+          <p:cNvSpPr/>
+          <p:nvPr/>
+        </p:nvSpPr>
+        <p:spPr>
+          <a:xfrm>
+            <a:off x="502920" y="777240"/>
+            <a:ext cx="164592" cy="164592"/>
+          </a:xfrm>
+          <a:prstGeom prst="ellipse">
+            <a:avLst/>
+          </a:prstGeom>
+          <a:solidFill>
+            <a:srgbClr val="FF5F57"/>
+          </a:solidFill>
+          <a:ln/>
+        </p:spPr>
+        <p:txBody>
+          <a:bodyPr/>
+          <a:lstStyle/>
+          <a:p>
+            <a:endParaRPr lang="en-IN"/>
+          </a:p>
+        </p:txBody>
+      </p:sp>
+      <p:sp>
+        <p:nvSpPr>
+          <p:cNvPr id="9" name="Shape 7"/>
+          <p:cNvSpPr/>
+          <p:nvPr/>
+        </p:nvSpPr>
+        <p:spPr>
+          <a:xfrm>
+            <a:off x="731520" y="777240"/>
+            <a:ext cx="164592" cy="164592"/>
+          </a:xfrm>
+          <a:prstGeom prst="ellipse">
+            <a:avLst/>
+          </a:prstGeom>
+          <a:solidFill>
+            <a:srgbClr val="FEBC2E"/>
+          </a:solidFill>
+          <a:ln/>
+        </p:spPr>
+        <p:txBody>
+          <a:bodyPr/>
+          <a:lstStyle/>
+          <a:p>
+            <a:endParaRPr lang="en-IN"/>
+          </a:p>
+        </p:txBody>
+      </p:sp>
+      <p:sp>
+        <p:nvSpPr>
+          <p:cNvPr id="10" name="Shape 8"/>
+          <p:cNvSpPr/>
+          <p:nvPr/>
+        </p:nvSpPr>
+        <p:spPr>
+          <a:xfrm>
+            <a:off x="960120" y="777240"/>
+            <a:ext cx="164592" cy="164592"/>
+          </a:xfrm>
+          <a:prstGeom prst="ellipse">
+            <a:avLst/>
+          </a:prstGeom>
+          <a:solidFill>
+            <a:srgbClr val="28C840"/>
+          </a:solidFill>
+          <a:ln/>
+        </p:spPr>
+        <p:txBody>
+          <a:bodyPr/>
+          <a:lstStyle/>
+          <a:p>
+            <a:endParaRPr lang="en-IN"/>
+          </a:p>
+        </p:txBody>
+      </p:sp>
+      <p:sp>
+        <p:nvSpPr>
+          <p:cNvPr id="11" name="Shape 9"/>
+          <p:cNvSpPr/>
+          <p:nvPr/>
+        </p:nvSpPr>
+        <p:spPr>
+          <a:xfrm>
+            <a:off x="1371600" y="777240"/>
+            <a:ext cx="5029200" cy="201168"/>
+          </a:xfrm>
+          <a:prstGeom prst="rect">
+            <a:avLst/>
+          </a:prstGeom>
+          <a:solidFill>
+            <a:srgbClr val="FFFFFF"/>
+          </a:solidFill>
+          <a:ln w="6350">
+            <a:solidFill>
+              <a:srgbClr val="CCCCCC"/>
+            </a:solidFill>
+            <a:prstDash val="solid"/>
+          </a:ln>
+        </p:spPr>
+        <p:txBody>
+          <a:bodyPr/>
+          <a:lstStyle/>
+          <a:p>
+            <a:endParaRPr lang="en-IN"/>
+          </a:p>
+        </p:txBody>
+      </p:sp>
+      <p:sp>
+        <p:nvSpPr>
+          <p:cNvPr id="12" name="Text 10"/>
+          <p:cNvSpPr/>
+          <p:nvPr/>
+        </p:nvSpPr>
+        <p:spPr>
+          <a:xfrm>
+            <a:off x="1389888" y="768096"/>
+            <a:ext cx="4992624" cy="219456"/>
+          </a:xfrm>
+          <a:prstGeom prst="rect">
+            <a:avLst/>
+          </a:prstGeom>
+          <a:noFill/>
+          <a:ln/>
+        </p:spPr>
+        <p:txBody>
+          <a:bodyPr wrap="square" rtlCol="0" anchor="ctr"/>
+          <a:lstStyle/>
+          <a:p>
+            <a:pPr marL="0" indent="0">
+              <a:buNone/>
+            </a:pPr>
+            <a:r>
+              <a:rPr lang="en-US" sz="900" dirty="0">
+                <a:solidFill>
+                  <a:srgbClr val="607D8B"/>
+                </a:solidFill>
+                <a:latin typeface="Calibri" pitchFamily="34" charset="0"/>
+                <a:ea typeface="Calibri" pitchFamily="34" charset="-122"/>
+                <a:cs typeface="Calibri" pitchFamily="34" charset="-120"/>
+              </a:rPr>
+              <a:t>[Paste your YouTube / Google Drive demo video link here]</a:t>
+            </a:r>
+            <a:endParaRPr lang="en-US" sz="900" dirty="0"/>
+          </a:p>
+        </p:txBody>
+      </p:sp>
+      <p:sp>
+        <p:nvSpPr>
+          <p:cNvPr id="13" name="Shape 11"/>
+          <p:cNvSpPr/>
+          <p:nvPr/>
+        </p:nvSpPr>
+        <p:spPr>
+          <a:xfrm>
+            <a:off x="3749040" y="1828800"/>
+            <a:ext cx="1645920" cy="1645920"/>
+          </a:xfrm>
+          <a:prstGeom prst="ellipse">
+            <a:avLst/>
+          </a:prstGeom>
+          <a:solidFill>
+            <a:srgbClr val="1B3A8A">
+              <a:alpha val="80000"/>
+            </a:srgbClr>
+          </a:solidFill>
+          <a:ln/>
+        </p:spPr>
+        <p:txBody>
+          <a:bodyPr/>
+          <a:lstStyle/>
+          <a:p>
+            <a:endParaRPr lang="en-IN"/>
+          </a:p>
+        </p:txBody>
+      </p:sp>
+      <p:sp>
+        <p:nvSpPr>
+          <p:cNvPr id="14" name="Text 12"/>
+          <p:cNvSpPr/>
+          <p:nvPr/>
+        </p:nvSpPr>
+        <p:spPr>
+          <a:xfrm>
+            <a:off x="3749040" y="1828800"/>
+            <a:ext cx="1645920" cy="1645920"/>
+          </a:xfrm>
+          <a:prstGeom prst="rect">
+            <a:avLst/>
+          </a:prstGeom>
+          <a:noFill/>
+          <a:ln/>
+        </p:spPr>
+        <p:txBody>
+          <a:bodyPr wrap="square" rtlCol="0" anchor="ctr"/>
+          <a:lstStyle/>
+          <a:p>
+            <a:pPr marL="0" indent="0" algn="ctr">
+              <a:buNone/>
+            </a:pPr>
+            <a:r>
+              <a:rPr lang="en-US" sz="4800" dirty="0">
+                <a:solidFill>
+                  <a:srgbClr val="FFFFFF"/>
+                </a:solidFill>
+              </a:rPr>
+              <a:t>▶</a:t>
+            </a:r>
+            <a:endParaRPr lang="en-US" sz="4800" dirty="0"/>
+          </a:p>
+        </p:txBody>
+      </p:sp>
+      <p:sp>
+        <p:nvSpPr>
+          <p:cNvPr id="15" name="Text 13"/>
+          <p:cNvSpPr/>
+          <p:nvPr/>
+        </p:nvSpPr>
+        <p:spPr>
+          <a:xfrm>
+            <a:off x="914400" y="3794760"/>
+            <a:ext cx="7315200" cy="594360"/>
+          </a:xfrm>
+          <a:prstGeom prst="rect">
+            <a:avLst/>
+          </a:prstGeom>
+          <a:noFill/>
+          <a:ln/>
+        </p:spPr>
+        <p:txBody>
+          <a:bodyPr wrap="square" rtlCol="0" anchor="ctr"/>
+          <a:lstStyle/>
+          <a:p>
+            <a:pPr marL="0" indent="0" algn="ctr">
+              <a:buNone/>
+            </a:pPr>
+            <a:r>
+              <a:rPr lang="en-US" sz="1100" i="1" dirty="0">
+                <a:solidFill>
+                  <a:srgbClr val="607D8B"/>
+                </a:solidFill>
+                <a:latin typeface="Calibri" pitchFamily="34" charset="0"/>
+                <a:ea typeface="Calibri" pitchFamily="34" charset="-122"/>
+                <a:cs typeface="Calibri" pitchFamily="34" charset="-120"/>
+              </a:rPr>
+              <a:t>Record a 5-7 minute walkthrough: Title page → Overview dashboard → apply a slicer → Price Deep Dive page → highlight 2-3 insights → show Power Query steps.</a:t>
+            </a:r>
+            <a:endParaRPr lang="en-US" sz="1100" dirty="0"/>
+          </a:p>
+          <a:p>
+            <a:pPr marL="0" indent="0" algn="ctr">
+              <a:buNone/>
+            </a:pPr>
+            <a:r>
+              <a:rPr lang="en-US" sz="1100" i="1" dirty="0">
+                <a:solidFill>
+                  <a:srgbClr val="607D8B"/>
+                </a:solidFill>
+                <a:latin typeface="Calibri" pitchFamily="34" charset="0"/>
+                <a:ea typeface="Calibri" pitchFamily="34" charset="-122"/>
+                <a:cs typeface="Calibri" pitchFamily="34" charset="-120"/>
+              </a:rPr>
+              <a:t>Upload to YouTube or Google Drive, then paste the link above before submission.</a:t>
+            </a:r>
+            <a:endParaRPr lang="en-US" sz="1100" dirty="0"/>
+          </a:p>
+        </p:txBody>
+      </p:sp>
+    </p:spTree>
+    <p:custDataLst>
+      <p:tags r:id="rId1"/>
+    </p:custDataLst>
+  </p:cSld>
+  <p:clrMapOvr>
+    <a:masterClrMapping/>
+  </p:clrMapOvr>
+</p:sld>
+</file>
+
+<file path=ppt/slides/slide13.xml><?xml version="1.0" encoding="utf-8"?>
+<p:sld xmlns:a="http://schemas.openxmlformats.org/drawingml/2006/main" xmlns:r="http://schemas.openxmlformats.org/officeDocument/2006/relationships" xmlns:p="http://schemas.openxmlformats.org/presentationml/2006/main">
+  <p:cSld name="Slide 9">
+    <p:bg>
+      <p:bgPr>
+        <a:solidFill>
+          <a:srgbClr val="FFFFFF"/>
+        </a:solidFill>
+        <a:effectLst/>
+      </p:bgPr>
+    </p:bg>
+    <p:spTree>
+      <p:nvGrpSpPr>
+        <p:cNvPr id="1" name=""/>
+        <p:cNvGrpSpPr/>
+        <p:nvPr/>
+      </p:nvGrpSpPr>
+      <p:grpSpPr>
+        <a:xfrm>
+          <a:off x="0" y="0"/>
+          <a:ext cx="0" cy="0"/>
+          <a:chOff x="0" y="0"/>
+          <a:chExt cx="0" cy="0"/>
+        </a:xfrm>
+      </p:grpSpPr>
+      <p:sp>
+        <p:nvSpPr>
+          <p:cNvPr id="4" name="Text 2"/>
+          <p:cNvSpPr/>
+          <p:nvPr/>
+        </p:nvSpPr>
+        <p:spPr>
+          <a:xfrm>
+            <a:off x="130351" y="612064"/>
+            <a:ext cx="8229600" cy="438912"/>
+          </a:xfrm>
+          <a:prstGeom prst="rect">
+            <a:avLst/>
+          </a:prstGeom>
+          <a:noFill/>
+          <a:ln/>
+        </p:spPr>
+        <p:txBody>
+          <a:bodyPr wrap="square" rtlCol="0" anchor="ctr"/>
+          <a:lstStyle/>
+          <a:p>
+            <a:pPr marL="0" indent="0">
+              <a:buNone/>
+            </a:pPr>
+            <a:r>
+              <a:rPr lang="en-US" sz="2000" b="1" dirty="0">
+                <a:solidFill>
+                  <a:srgbClr val="1B3A8A"/>
+                </a:solidFill>
+                <a:latin typeface="Lato" panose="020F0502020204030203" pitchFamily="34" charset="0"/>
+                <a:ea typeface="Calibri" pitchFamily="34" charset="-122"/>
+                <a:cs typeface="Arial" panose="020B0604020202020204" pitchFamily="34" charset="0"/>
+              </a:rPr>
+              <a:t>Conclusion</a:t>
+            </a:r>
+            <a:endParaRPr lang="en-US" sz="2000" dirty="0">
+              <a:latin typeface="Lato" panose="020F0502020204030203" pitchFamily="34" charset="0"/>
+              <a:cs typeface="Arial" panose="020B0604020202020204" pitchFamily="34" charset="0"/>
+            </a:endParaRPr>
+          </a:p>
+        </p:txBody>
+      </p:sp>
+      <p:sp>
+        <p:nvSpPr>
+          <p:cNvPr id="14" name="Text 12"/>
+          <p:cNvSpPr/>
+          <p:nvPr/>
+        </p:nvSpPr>
+        <p:spPr>
+          <a:xfrm>
+            <a:off x="125486" y="1084927"/>
+            <a:ext cx="4446513" cy="3474720"/>
+          </a:xfrm>
+          <a:prstGeom prst="rect">
+            <a:avLst/>
+          </a:prstGeom>
+          <a:noFill/>
+          <a:ln/>
+        </p:spPr>
+        <p:txBody>
+          <a:bodyPr wrap="square" rtlCol="0" anchor="t"/>
+          <a:lstStyle/>
+          <a:p>
+            <a:pPr marL="0" indent="0">
+              <a:buNone/>
+            </a:pPr>
+            <a:r>
+              <a:rPr lang="en-US" sz="1200" dirty="0">
+                <a:solidFill>
+                  <a:srgbClr val="1A1A2E"/>
+                </a:solidFill>
+                <a:latin typeface="Lato" panose="020F0502020204030203" pitchFamily="34" charset="0"/>
+                <a:ea typeface="Calibri" pitchFamily="34" charset="-122"/>
+                <a:cs typeface="Arial" panose="020B0604020202020204" pitchFamily="34" charset="0"/>
+              </a:rPr>
+              <a:t>This project successfully cleaned 3,028 raw Gurgaon apartment listings and built an interactive Power BI dashboard that makes real estate market data actionable. All project objectives were achieved: data was cleaned using Power Query, key DAX measures were created, and a two-page dashboard with dynamic slicers was delivered. Key findings include significant price variation across sectors, 3 BHK being the dominant market configuration (47%), and price-per-sqft being a more reliable comparison metric than total price. The project demonstrates that business intelligence tools can transform messy, scattered property data into insights that genuinely help buyers, investors, and analysts make better decisions. AI Chatbot assistance accelerated the Power Query and DAX development process significantly.</a:t>
+            </a:r>
+            <a:endParaRPr lang="en-US" sz="1200" dirty="0">
+              <a:latin typeface="Lato" panose="020F0502020204030203" pitchFamily="34" charset="0"/>
+              <a:cs typeface="Arial" panose="020B0604020202020204" pitchFamily="34" charset="0"/>
+            </a:endParaRPr>
+          </a:p>
+        </p:txBody>
+      </p:sp>
+      <p:sp>
+        <p:nvSpPr>
+          <p:cNvPr id="19" name="Text 17"/>
+          <p:cNvSpPr/>
+          <p:nvPr/>
+        </p:nvSpPr>
+        <p:spPr>
+          <a:xfrm>
+            <a:off x="5303520" y="3474720"/>
+            <a:ext cx="3017520" cy="502920"/>
+          </a:xfrm>
+          <a:prstGeom prst="rect">
+            <a:avLst/>
+          </a:prstGeom>
+          <a:noFill/>
+          <a:ln/>
+        </p:spPr>
+        <p:txBody>
+          <a:bodyPr wrap="square" rtlCol="0" anchor="ctr"/>
+          <a:lstStyle/>
+          <a:p>
+            <a:pPr marL="0" indent="0" algn="ctr">
+              <a:buNone/>
+            </a:pPr>
+            <a:r>
+              <a:rPr lang="en-US" sz="1600" b="1" kern="0" spc="200" dirty="0">
+                <a:solidFill>
+                  <a:srgbClr val="FFFFFF"/>
+                </a:solidFill>
+                <a:latin typeface="Lato" panose="020F0502020204030203" pitchFamily="34" charset="0"/>
+                <a:ea typeface="Calibri" pitchFamily="34" charset="-122"/>
+                <a:cs typeface="Calibri" pitchFamily="34" charset="-120"/>
+              </a:rPr>
+              <a:t>CONCLUSION</a:t>
+            </a:r>
+            <a:endParaRPr lang="en-US" sz="1600" dirty="0">
+              <a:latin typeface="Lato" panose="020F0502020204030203" pitchFamily="34" charset="0"/>
+            </a:endParaRPr>
+          </a:p>
+        </p:txBody>
+      </p:sp>
+      <p:pic>
+        <p:nvPicPr>
+          <p:cNvPr id="20" name="Picture 19" descr="A blue circle with a pencil and paper with a star on it  AI-generated content may be incorrect.">
+            <a:extLst>
+              <a:ext uri="{FF2B5EF4-FFF2-40B4-BE49-F238E27FC236}">
+                <a16:creationId xmlns:a16="http://schemas.microsoft.com/office/drawing/2014/main" id="{BAE68F53-65EE-1751-E92D-7025D978B68E}"/>
+              </a:ext>
+            </a:extLst>
+          </p:cNvPr>
+          <p:cNvPicPr>
+            <a:picLocks noChangeAspect="1"/>
+          </p:cNvPicPr>
+          <p:nvPr/>
+        </p:nvPicPr>
+        <p:blipFill>
+          <a:blip r:embed="rId4">
+            <a:duotone>
+              <a:schemeClr val="accent1">
+                <a:shade val="45000"/>
+                <a:satMod val="135000"/>
+              </a:schemeClr>
+              <a:prstClr val="white"/>
+            </a:duotone>
+          </a:blip>
+          <a:srcRect l="25397" t="26296" r="26825" b="29752"/>
+          <a:stretch>
+            <a:fillRect/>
+          </a:stretch>
+        </p:blipFill>
+        <p:spPr>
+          <a:xfrm>
+            <a:off x="4898406" y="971550"/>
+            <a:ext cx="3597456" cy="3309355"/>
+          </a:xfrm>
+          <a:prstGeom prst="rect">
+            <a:avLst/>
+          </a:prstGeom>
+        </p:spPr>
+      </p:pic>
+    </p:spTree>
+    <p:custDataLst>
+      <p:tags r:id="rId1"/>
+    </p:custDataLst>
+  </p:cSld>
+  <p:clrMapOvr>
+    <a:masterClrMapping/>
+  </p:clrMapOvr>
+</p:sld>
+</file>
+
+<file path=ppt/slides/slide14.xml><?xml version="1.0" encoding="utf-8"?>
+<p:sld xmlns:a="http://schemas.openxmlformats.org/drawingml/2006/main" xmlns:r="http://schemas.openxmlformats.org/officeDocument/2006/relationships" xmlns:p="http://schemas.openxmlformats.org/presentationml/2006/main">
   <p:cSld name="Slide 10">
     <p:spTree>
       <p:nvGrpSpPr>
@@ -4145,7 +4876,7 @@
 </p:sld>
 </file>
 
-<file path=ppt/slides/slide11.xml><?xml version="1.0" encoding="utf-8"?>
+<file path=ppt/slides/slide15.xml><?xml version="1.0" encoding="utf-8"?>
 <p:sld xmlns:a="http://schemas.openxmlformats.org/drawingml/2006/main" xmlns:r="http://schemas.openxmlformats.org/officeDocument/2006/relationships" xmlns:p="http://schemas.openxmlformats.org/presentationml/2006/main">
   <p:cSld name="Slide 11">
     <p:bg>
@@ -4885,10 +5616,10 @@
             </a:pathLst>
           </a:custGeom>
           <a:blipFill>
-            <a:blip r:embed="rId4">
+            <a:blip>
               <a:extLst>
                 <a:ext uri="{96DAC541-7B7A-43D3-8B79-37D633B846F1}">
-                  <asvg:svgBlip xmlns:asvg="http://schemas.microsoft.com/office/drawing/2016/SVG/main" r:embed="rId5"/>
+                  <asvg:svgBlip xmlns:asvg="http://schemas.microsoft.com/office/drawing/2016/SVG/main" r:embed="rId4"/>
                 </a:ext>
               </a:extLst>
             </a:blip>
@@ -5315,7 +6046,65 @@
                 <a:ea typeface="Calibri" pitchFamily="34" charset="-122"/>
                 <a:cs typeface="Arial" panose="020B0604020202020204" pitchFamily="34" charset="0"/>
               </a:rPr>
-              <a:t>This project transforms raw Gurgaon apartment listing data into a structured, interactive Power BI dashboard. Raw text fields (prices in Lac/Crore, area in mixed formats, bedroom counts as text) were cleaned using Power Query in Power BI Desktop. DAX measures calculate key KPIs: Average Price, Median Price, Average Price per Sq.Ft., and Total Listings. The dashboard features dynamic slicers (BHK type, Sector, Property Age, Facing), a sector-wise price bar chart, BHK distribution donut chart, area vs. price scatter plot, and a Sector x BHK matrix table. AI Chatbot assistance was used for data interpretation, Power Query formula writing, and DAX measure design. The result is a self-service analytics tool that helps stakeholders answer real estate questions in seconds.</a:t>
+              <a:t>This project transforms raw Gurgaon apartment listing data into a structured, interactive Power BI dashboard. Raw text fields (prices in Lac/Crore, area in mixed formats, bedroom counts as text) were cleaned using Power Query in Power BI Desktop. </a:t>
+            </a:r>
+          </a:p>
+          <a:p>
+            <a:pPr marL="0" indent="0">
+              <a:buNone/>
+            </a:pPr>
+            <a:endParaRPr lang="en-US" sz="1200" dirty="0">
+              <a:solidFill>
+                <a:srgbClr val="1A1A2E"/>
+              </a:solidFill>
+              <a:latin typeface="Lato" panose="020F0502020204030203" pitchFamily="34" charset="0"/>
+              <a:ea typeface="Calibri" pitchFamily="34" charset="-122"/>
+              <a:cs typeface="Arial" panose="020B0604020202020204" pitchFamily="34" charset="0"/>
+            </a:endParaRPr>
+          </a:p>
+          <a:p>
+            <a:pPr marL="0" indent="0">
+              <a:buNone/>
+            </a:pPr>
+            <a:r>
+              <a:rPr lang="en-US" sz="1200" dirty="0">
+                <a:solidFill>
+                  <a:srgbClr val="1A1A2E"/>
+                </a:solidFill>
+                <a:latin typeface="Lato" panose="020F0502020204030203" pitchFamily="34" charset="0"/>
+                <a:ea typeface="Calibri" pitchFamily="34" charset="-122"/>
+                <a:cs typeface="Arial" panose="020B0604020202020204" pitchFamily="34" charset="0"/>
+              </a:rPr>
+              <a:t>DAX measures calculate key KPIs: Average Price, Median Price, Average Price per Sq.Ft., and Total Listings. The dashboard features dynamic slicers (BHK type, Sector, Property Age, Facing), a sector-wise price bar chart, BHK distribution donut chart, area vs. price scatter plot, and a Sector x BHK matrix table. </a:t>
+            </a:r>
+          </a:p>
+          <a:p>
+            <a:pPr marL="0" indent="0">
+              <a:buNone/>
+            </a:pPr>
+            <a:endParaRPr lang="en-US" sz="1200" dirty="0">
+              <a:solidFill>
+                <a:srgbClr val="1A1A2E"/>
+              </a:solidFill>
+              <a:latin typeface="Lato" panose="020F0502020204030203" pitchFamily="34" charset="0"/>
+              <a:ea typeface="Calibri" pitchFamily="34" charset="-122"/>
+              <a:cs typeface="Arial" panose="020B0604020202020204" pitchFamily="34" charset="0"/>
+            </a:endParaRPr>
+          </a:p>
+          <a:p>
+            <a:pPr marL="0" indent="0">
+              <a:buNone/>
+            </a:pPr>
+            <a:r>
+              <a:rPr lang="en-US" sz="1200" dirty="0">
+                <a:solidFill>
+                  <a:srgbClr val="1A1A2E"/>
+                </a:solidFill>
+                <a:latin typeface="Lato" panose="020F0502020204030203" pitchFamily="34" charset="0"/>
+                <a:ea typeface="Calibri" pitchFamily="34" charset="-122"/>
+                <a:cs typeface="Arial" panose="020B0604020202020204" pitchFamily="34" charset="0"/>
+              </a:rPr>
+              <a:t>AI Chatbot assistance was used for data interpretation, Power Query formula writing, and DAX measure design. The result is a self-service analytics tool that helps stakeholders answer real estate questions in seconds.</a:t>
             </a:r>
             <a:endParaRPr lang="en-US" sz="1200" dirty="0">
               <a:latin typeface="Lato" panose="020F0502020204030203" pitchFamily="34" charset="0"/>
@@ -6581,15 +7370,7 @@
 
 <file path=ppt/slides/slide8.xml><?xml version="1.0" encoding="utf-8"?>
 <p:sld xmlns:a="http://schemas.openxmlformats.org/drawingml/2006/main" xmlns:r="http://schemas.openxmlformats.org/officeDocument/2006/relationships" xmlns:p="http://schemas.openxmlformats.org/presentationml/2006/main">
-  <p:cSld name="Slide 8">
-    <p:bg>
-      <p:bgPr>
-        <a:solidFill>
-          <a:srgbClr val="FFFFFF"/>
-        </a:solidFill>
-        <a:effectLst/>
-      </p:bgPr>
-    </p:bg>
+  <p:cSld>
     <p:spTree>
       <p:nvGrpSpPr>
         <p:cNvPr id="1" name=""/>
@@ -6604,381 +7385,42 @@
           <a:chExt cx="0" cy="0"/>
         </a:xfrm>
       </p:grpSpPr>
-      <p:sp>
-        <p:nvSpPr>
-          <p:cNvPr id="4" name="Text 2"/>
-          <p:cNvSpPr/>
-          <p:nvPr/>
-        </p:nvSpPr>
-        <p:spPr>
-          <a:xfrm>
-            <a:off x="320040" y="621792"/>
-            <a:ext cx="8229600" cy="438912"/>
+      <p:pic>
+        <p:nvPicPr>
+          <p:cNvPr id="3" name="Picture 2">
+            <a:extLst>
+              <a:ext uri="{FF2B5EF4-FFF2-40B4-BE49-F238E27FC236}">
+                <a16:creationId xmlns:a16="http://schemas.microsoft.com/office/drawing/2014/main" id="{1CE15A3D-2AF3-7C82-23E0-4CC6FE0A3E8C}"/>
+              </a:ext>
+            </a:extLst>
+          </p:cNvPr>
+          <p:cNvPicPr>
+            <a:picLocks noChangeAspect="1"/>
+          </p:cNvPicPr>
+          <p:nvPr/>
+        </p:nvPicPr>
+        <p:blipFill>
+          <a:blip r:embed="rId2"/>
+          <a:stretch>
+            <a:fillRect/>
+          </a:stretch>
+        </p:blipFill>
+        <p:spPr>
+          <a:xfrm>
+            <a:off x="1113393" y="644353"/>
+            <a:ext cx="6917214" cy="3854794"/>
           </a:xfrm>
           <a:prstGeom prst="rect">
             <a:avLst/>
           </a:prstGeom>
-          <a:noFill/>
-          <a:ln/>
-        </p:spPr>
-        <p:txBody>
-          <a:bodyPr wrap="square" rtlCol="0" anchor="ctr"/>
-          <a:lstStyle/>
-          <a:p>
-            <a:pPr marL="0" indent="0">
-              <a:buNone/>
-            </a:pPr>
-            <a:r>
-              <a:rPr lang="en-US" sz="2200" b="1" dirty="0">
-                <a:solidFill>
-                  <a:srgbClr val="1B3A8A"/>
-                </a:solidFill>
-                <a:latin typeface="Calibri" pitchFamily="34" charset="0"/>
-                <a:ea typeface="Calibri" pitchFamily="34" charset="-122"/>
-                <a:cs typeface="Calibri" pitchFamily="34" charset="-120"/>
-              </a:rPr>
-              <a:t>Video of Project Demo</a:t>
-            </a:r>
-            <a:endParaRPr lang="en-US" sz="2200" dirty="0"/>
-          </a:p>
-        </p:txBody>
-      </p:sp>
-      <p:sp>
-        <p:nvSpPr>
-          <p:cNvPr id="6" name="Shape 4"/>
-          <p:cNvSpPr/>
-          <p:nvPr/>
-        </p:nvSpPr>
-        <p:spPr>
-          <a:xfrm>
-            <a:off x="365760" y="685800"/>
-            <a:ext cx="8412480" cy="3977640"/>
-          </a:xfrm>
-          <a:prstGeom prst="rect">
-            <a:avLst/>
-          </a:prstGeom>
-          <a:solidFill>
-            <a:srgbClr val="ECEFF1"/>
-          </a:solidFill>
-          <a:ln w="25400">
-            <a:solidFill>
-              <a:srgbClr val="1B3A8A"/>
-            </a:solidFill>
-            <a:prstDash val="solid"/>
-          </a:ln>
-        </p:spPr>
-        <p:txBody>
-          <a:bodyPr/>
-          <a:lstStyle/>
-          <a:p>
-            <a:endParaRPr lang="en-IN"/>
-          </a:p>
-        </p:txBody>
-      </p:sp>
-      <p:sp>
-        <p:nvSpPr>
-          <p:cNvPr id="7" name="Shape 5"/>
-          <p:cNvSpPr/>
-          <p:nvPr/>
-        </p:nvSpPr>
-        <p:spPr>
-          <a:xfrm>
-            <a:off x="365760" y="685800"/>
-            <a:ext cx="8412480" cy="384048"/>
-          </a:xfrm>
-          <a:prstGeom prst="rect">
-            <a:avLst/>
-          </a:prstGeom>
-          <a:solidFill>
-            <a:srgbClr val="E0E0E0"/>
-          </a:solidFill>
-          <a:ln/>
-        </p:spPr>
-        <p:txBody>
-          <a:bodyPr/>
-          <a:lstStyle/>
-          <a:p>
-            <a:endParaRPr lang="en-IN"/>
-          </a:p>
-        </p:txBody>
-      </p:sp>
-      <p:sp>
-        <p:nvSpPr>
-          <p:cNvPr id="8" name="Shape 6"/>
-          <p:cNvSpPr/>
-          <p:nvPr/>
-        </p:nvSpPr>
-        <p:spPr>
-          <a:xfrm>
-            <a:off x="502920" y="777240"/>
-            <a:ext cx="164592" cy="164592"/>
-          </a:xfrm>
-          <a:prstGeom prst="ellipse">
-            <a:avLst/>
-          </a:prstGeom>
-          <a:solidFill>
-            <a:srgbClr val="FF5F57"/>
-          </a:solidFill>
-          <a:ln/>
-        </p:spPr>
-        <p:txBody>
-          <a:bodyPr/>
-          <a:lstStyle/>
-          <a:p>
-            <a:endParaRPr lang="en-IN"/>
-          </a:p>
-        </p:txBody>
-      </p:sp>
-      <p:sp>
-        <p:nvSpPr>
-          <p:cNvPr id="9" name="Shape 7"/>
-          <p:cNvSpPr/>
-          <p:nvPr/>
-        </p:nvSpPr>
-        <p:spPr>
-          <a:xfrm>
-            <a:off x="731520" y="777240"/>
-            <a:ext cx="164592" cy="164592"/>
-          </a:xfrm>
-          <a:prstGeom prst="ellipse">
-            <a:avLst/>
-          </a:prstGeom>
-          <a:solidFill>
-            <a:srgbClr val="FEBC2E"/>
-          </a:solidFill>
-          <a:ln/>
-        </p:spPr>
-        <p:txBody>
-          <a:bodyPr/>
-          <a:lstStyle/>
-          <a:p>
-            <a:endParaRPr lang="en-IN"/>
-          </a:p>
-        </p:txBody>
-      </p:sp>
-      <p:sp>
-        <p:nvSpPr>
-          <p:cNvPr id="10" name="Shape 8"/>
-          <p:cNvSpPr/>
-          <p:nvPr/>
-        </p:nvSpPr>
-        <p:spPr>
-          <a:xfrm>
-            <a:off x="960120" y="777240"/>
-            <a:ext cx="164592" cy="164592"/>
-          </a:xfrm>
-          <a:prstGeom prst="ellipse">
-            <a:avLst/>
-          </a:prstGeom>
-          <a:solidFill>
-            <a:srgbClr val="28C840"/>
-          </a:solidFill>
-          <a:ln/>
-        </p:spPr>
-        <p:txBody>
-          <a:bodyPr/>
-          <a:lstStyle/>
-          <a:p>
-            <a:endParaRPr lang="en-IN"/>
-          </a:p>
-        </p:txBody>
-      </p:sp>
-      <p:sp>
-        <p:nvSpPr>
-          <p:cNvPr id="11" name="Shape 9"/>
-          <p:cNvSpPr/>
-          <p:nvPr/>
-        </p:nvSpPr>
-        <p:spPr>
-          <a:xfrm>
-            <a:off x="1371600" y="777240"/>
-            <a:ext cx="5029200" cy="201168"/>
-          </a:xfrm>
-          <a:prstGeom prst="rect">
-            <a:avLst/>
-          </a:prstGeom>
-          <a:solidFill>
-            <a:srgbClr val="FFFFFF"/>
-          </a:solidFill>
-          <a:ln w="6350">
-            <a:solidFill>
-              <a:srgbClr val="CCCCCC"/>
-            </a:solidFill>
-            <a:prstDash val="solid"/>
-          </a:ln>
-        </p:spPr>
-        <p:txBody>
-          <a:bodyPr/>
-          <a:lstStyle/>
-          <a:p>
-            <a:endParaRPr lang="en-IN"/>
-          </a:p>
-        </p:txBody>
-      </p:sp>
-      <p:sp>
-        <p:nvSpPr>
-          <p:cNvPr id="12" name="Text 10"/>
-          <p:cNvSpPr/>
-          <p:nvPr/>
-        </p:nvSpPr>
-        <p:spPr>
-          <a:xfrm>
-            <a:off x="1389888" y="768096"/>
-            <a:ext cx="4992624" cy="219456"/>
-          </a:xfrm>
-          <a:prstGeom prst="rect">
-            <a:avLst/>
-          </a:prstGeom>
-          <a:noFill/>
-          <a:ln/>
-        </p:spPr>
-        <p:txBody>
-          <a:bodyPr wrap="square" rtlCol="0" anchor="ctr"/>
-          <a:lstStyle/>
-          <a:p>
-            <a:pPr marL="0" indent="0">
-              <a:buNone/>
-            </a:pPr>
-            <a:r>
-              <a:rPr lang="en-US" sz="900" dirty="0">
-                <a:solidFill>
-                  <a:srgbClr val="607D8B"/>
-                </a:solidFill>
-                <a:latin typeface="Calibri" pitchFamily="34" charset="0"/>
-                <a:ea typeface="Calibri" pitchFamily="34" charset="-122"/>
-                <a:cs typeface="Calibri" pitchFamily="34" charset="-120"/>
-              </a:rPr>
-              <a:t>[Paste your YouTube / Google Drive demo video link here]</a:t>
-            </a:r>
-            <a:endParaRPr lang="en-US" sz="900" dirty="0"/>
-          </a:p>
-        </p:txBody>
-      </p:sp>
-      <p:sp>
-        <p:nvSpPr>
-          <p:cNvPr id="13" name="Shape 11"/>
-          <p:cNvSpPr/>
-          <p:nvPr/>
-        </p:nvSpPr>
-        <p:spPr>
-          <a:xfrm>
-            <a:off x="3749040" y="1828800"/>
-            <a:ext cx="1645920" cy="1645920"/>
-          </a:xfrm>
-          <a:prstGeom prst="ellipse">
-            <a:avLst/>
-          </a:prstGeom>
-          <a:solidFill>
-            <a:srgbClr val="1B3A8A">
-              <a:alpha val="80000"/>
-            </a:srgbClr>
-          </a:solidFill>
-          <a:ln/>
-        </p:spPr>
-        <p:txBody>
-          <a:bodyPr/>
-          <a:lstStyle/>
-          <a:p>
-            <a:endParaRPr lang="en-IN"/>
-          </a:p>
-        </p:txBody>
-      </p:sp>
-      <p:sp>
-        <p:nvSpPr>
-          <p:cNvPr id="14" name="Text 12"/>
-          <p:cNvSpPr/>
-          <p:nvPr/>
-        </p:nvSpPr>
-        <p:spPr>
-          <a:xfrm>
-            <a:off x="3749040" y="1828800"/>
-            <a:ext cx="1645920" cy="1645920"/>
-          </a:xfrm>
-          <a:prstGeom prst="rect">
-            <a:avLst/>
-          </a:prstGeom>
-          <a:noFill/>
-          <a:ln/>
-        </p:spPr>
-        <p:txBody>
-          <a:bodyPr wrap="square" rtlCol="0" anchor="ctr"/>
-          <a:lstStyle/>
-          <a:p>
-            <a:pPr marL="0" indent="0" algn="ctr">
-              <a:buNone/>
-            </a:pPr>
-            <a:r>
-              <a:rPr lang="en-US" sz="4800" dirty="0">
-                <a:solidFill>
-                  <a:srgbClr val="FFFFFF"/>
-                </a:solidFill>
-              </a:rPr>
-              <a:t>▶</a:t>
-            </a:r>
-            <a:endParaRPr lang="en-US" sz="4800" dirty="0"/>
-          </a:p>
-        </p:txBody>
-      </p:sp>
-      <p:sp>
-        <p:nvSpPr>
-          <p:cNvPr id="15" name="Text 13"/>
-          <p:cNvSpPr/>
-          <p:nvPr/>
-        </p:nvSpPr>
-        <p:spPr>
-          <a:xfrm>
-            <a:off x="914400" y="3794760"/>
-            <a:ext cx="7315200" cy="594360"/>
-          </a:xfrm>
-          <a:prstGeom prst="rect">
-            <a:avLst/>
-          </a:prstGeom>
-          <a:noFill/>
-          <a:ln/>
-        </p:spPr>
-        <p:txBody>
-          <a:bodyPr wrap="square" rtlCol="0" anchor="ctr"/>
-          <a:lstStyle/>
-          <a:p>
-            <a:pPr marL="0" indent="0" algn="ctr">
-              <a:buNone/>
-            </a:pPr>
-            <a:r>
-              <a:rPr lang="en-US" sz="1100" i="1" dirty="0">
-                <a:solidFill>
-                  <a:srgbClr val="607D8B"/>
-                </a:solidFill>
-                <a:latin typeface="Calibri" pitchFamily="34" charset="0"/>
-                <a:ea typeface="Calibri" pitchFamily="34" charset="-122"/>
-                <a:cs typeface="Calibri" pitchFamily="34" charset="-120"/>
-              </a:rPr>
-              <a:t>Record a 5-7 minute walkthrough: Title page → Overview dashboard → apply a slicer → Price Deep Dive page → highlight 2-3 insights → show Power Query steps.</a:t>
-            </a:r>
-            <a:endParaRPr lang="en-US" sz="1100" dirty="0"/>
-          </a:p>
-          <a:p>
-            <a:pPr marL="0" indent="0" algn="ctr">
-              <a:buNone/>
-            </a:pPr>
-            <a:r>
-              <a:rPr lang="en-US" sz="1100" i="1" dirty="0">
-                <a:solidFill>
-                  <a:srgbClr val="607D8B"/>
-                </a:solidFill>
-                <a:latin typeface="Calibri" pitchFamily="34" charset="0"/>
-                <a:ea typeface="Calibri" pitchFamily="34" charset="-122"/>
-                <a:cs typeface="Calibri" pitchFamily="34" charset="-120"/>
-              </a:rPr>
-              <a:t>Upload to YouTube or Google Drive, then paste the link above before submission.</a:t>
-            </a:r>
-            <a:endParaRPr lang="en-US" sz="1100" dirty="0"/>
-          </a:p>
-        </p:txBody>
-      </p:sp>
+        </p:spPr>
+      </p:pic>
     </p:spTree>
-    <p:custDataLst>
-      <p:tags r:id="rId1"/>
-    </p:custDataLst>
+    <p:extLst>
+      <p:ext uri="{BB962C8B-B14F-4D97-AF65-F5344CB8AC3E}">
+        <p14:creationId xmlns:p14="http://schemas.microsoft.com/office/powerpoint/2010/main" val="1589819278"/>
+      </p:ext>
+    </p:extLst>
   </p:cSld>
   <p:clrMapOvr>
     <a:masterClrMapping/>
@@ -6988,15 +7430,7 @@
 
 <file path=ppt/slides/slide9.xml><?xml version="1.0" encoding="utf-8"?>
 <p:sld xmlns:a="http://schemas.openxmlformats.org/drawingml/2006/main" xmlns:r="http://schemas.openxmlformats.org/officeDocument/2006/relationships" xmlns:p="http://schemas.openxmlformats.org/presentationml/2006/main">
-  <p:cSld name="Slide 9">
-    <p:bg>
-      <p:bgPr>
-        <a:solidFill>
-          <a:srgbClr val="FFFFFF"/>
-        </a:solidFill>
-        <a:effectLst/>
-      </p:bgPr>
-    </p:bg>
+  <p:cSld>
     <p:spTree>
       <p:nvGrpSpPr>
         <p:cNvPr id="1" name=""/>
@@ -7011,137 +7445,12 @@
           <a:chExt cx="0" cy="0"/>
         </a:xfrm>
       </p:grpSpPr>
-      <p:sp>
-        <p:nvSpPr>
-          <p:cNvPr id="4" name="Text 2"/>
-          <p:cNvSpPr/>
-          <p:nvPr/>
-        </p:nvSpPr>
-        <p:spPr>
-          <a:xfrm>
-            <a:off x="130351" y="612064"/>
-            <a:ext cx="8229600" cy="438912"/>
-          </a:xfrm>
-          <a:prstGeom prst="rect">
-            <a:avLst/>
-          </a:prstGeom>
-          <a:noFill/>
-          <a:ln/>
-        </p:spPr>
-        <p:txBody>
-          <a:bodyPr wrap="square" rtlCol="0" anchor="ctr"/>
-          <a:lstStyle/>
-          <a:p>
-            <a:pPr marL="0" indent="0">
-              <a:buNone/>
-            </a:pPr>
-            <a:r>
-              <a:rPr lang="en-US" sz="2000" b="1" dirty="0">
-                <a:solidFill>
-                  <a:srgbClr val="1B3A8A"/>
-                </a:solidFill>
-                <a:latin typeface="Lato" panose="020F0502020204030203" pitchFamily="34" charset="0"/>
-                <a:ea typeface="Calibri" pitchFamily="34" charset="-122"/>
-                <a:cs typeface="Arial" panose="020B0604020202020204" pitchFamily="34" charset="0"/>
-              </a:rPr>
-              <a:t>Conclusion</a:t>
-            </a:r>
-            <a:endParaRPr lang="en-US" sz="2000" dirty="0">
-              <a:latin typeface="Lato" panose="020F0502020204030203" pitchFamily="34" charset="0"/>
-              <a:cs typeface="Arial" panose="020B0604020202020204" pitchFamily="34" charset="0"/>
-            </a:endParaRPr>
-          </a:p>
-        </p:txBody>
-      </p:sp>
-      <p:sp>
-        <p:nvSpPr>
-          <p:cNvPr id="14" name="Text 12"/>
-          <p:cNvSpPr/>
-          <p:nvPr/>
-        </p:nvSpPr>
-        <p:spPr>
-          <a:xfrm>
-            <a:off x="125486" y="1084927"/>
-            <a:ext cx="4446513" cy="3474720"/>
-          </a:xfrm>
-          <a:prstGeom prst="rect">
-            <a:avLst/>
-          </a:prstGeom>
-          <a:noFill/>
-          <a:ln/>
-        </p:spPr>
-        <p:txBody>
-          <a:bodyPr wrap="square" rtlCol="0" anchor="t"/>
-          <a:lstStyle/>
-          <a:p>
-            <a:pPr marL="0" indent="0">
-              <a:buNone/>
-            </a:pPr>
-            <a:r>
-              <a:rPr lang="en-US" sz="1200" dirty="0">
-                <a:solidFill>
-                  <a:srgbClr val="1A1A2E"/>
-                </a:solidFill>
-                <a:latin typeface="Lato" panose="020F0502020204030203" pitchFamily="34" charset="0"/>
-                <a:ea typeface="Calibri" pitchFamily="34" charset="-122"/>
-                <a:cs typeface="Arial" panose="020B0604020202020204" pitchFamily="34" charset="0"/>
-              </a:rPr>
-              <a:t>This project successfully cleaned 3,028 raw Gurgaon apartment listings and built an interactive Power BI dashboard that makes real estate market data actionable. All project objectives were achieved: data was cleaned using Power Query, key DAX measures were created, and a two-page dashboard with dynamic slicers was delivered. Key findings include significant price variation across sectors, 3 BHK being the dominant market configuration (47%), and price-per-sqft being a more reliable comparison metric than total price. The project demonstrates that business intelligence tools can transform messy, scattered property data into insights that genuinely help buyers, investors, and analysts make better decisions. AI Chatbot assistance accelerated the Power Query and DAX development process significantly.</a:t>
-            </a:r>
-            <a:endParaRPr lang="en-US" sz="1200" dirty="0">
-              <a:latin typeface="Lato" panose="020F0502020204030203" pitchFamily="34" charset="0"/>
-              <a:cs typeface="Arial" panose="020B0604020202020204" pitchFamily="34" charset="0"/>
-            </a:endParaRPr>
-          </a:p>
-        </p:txBody>
-      </p:sp>
-      <p:sp>
-        <p:nvSpPr>
-          <p:cNvPr id="19" name="Text 17"/>
-          <p:cNvSpPr/>
-          <p:nvPr/>
-        </p:nvSpPr>
-        <p:spPr>
-          <a:xfrm>
-            <a:off x="5303520" y="3474720"/>
-            <a:ext cx="3017520" cy="502920"/>
-          </a:xfrm>
-          <a:prstGeom prst="rect">
-            <a:avLst/>
-          </a:prstGeom>
-          <a:noFill/>
-          <a:ln/>
-        </p:spPr>
-        <p:txBody>
-          <a:bodyPr wrap="square" rtlCol="0" anchor="ctr"/>
-          <a:lstStyle/>
-          <a:p>
-            <a:pPr marL="0" indent="0" algn="ctr">
-              <a:buNone/>
-            </a:pPr>
-            <a:r>
-              <a:rPr lang="en-US" sz="1600" b="1" kern="0" spc="200" dirty="0">
-                <a:solidFill>
-                  <a:srgbClr val="FFFFFF"/>
-                </a:solidFill>
-                <a:latin typeface="Lato" panose="020F0502020204030203" pitchFamily="34" charset="0"/>
-                <a:ea typeface="Calibri" pitchFamily="34" charset="-122"/>
-                <a:cs typeface="Calibri" pitchFamily="34" charset="-120"/>
-              </a:rPr>
-              <a:t>CONCLUSION</a:t>
-            </a:r>
-            <a:endParaRPr lang="en-US" sz="1600" dirty="0">
-              <a:latin typeface="Lato" panose="020F0502020204030203" pitchFamily="34" charset="0"/>
-            </a:endParaRPr>
-          </a:p>
-        </p:txBody>
-      </p:sp>
       <p:pic>
         <p:nvPicPr>
-          <p:cNvPr id="20" name="Picture 19" descr="A blue circle with a pencil and paper with a star on it  AI-generated content may be incorrect.">
+          <p:cNvPr id="3" name="Picture 2">
             <a:extLst>
               <a:ext uri="{FF2B5EF4-FFF2-40B4-BE49-F238E27FC236}">
-                <a16:creationId xmlns:a16="http://schemas.microsoft.com/office/drawing/2014/main" id="{BAE68F53-65EE-1751-E92D-7025D978B68E}"/>
+                <a16:creationId xmlns:a16="http://schemas.microsoft.com/office/drawing/2014/main" id="{DBB97606-2DBC-2FC7-73F4-55BE8D3CBF2F}"/>
               </a:ext>
             </a:extLst>
           </p:cNvPr>
@@ -7151,24 +7460,15 @@
           <p:nvPr/>
         </p:nvPicPr>
         <p:blipFill>
-          <a:blip r:embed="rId4">
-            <a:duotone>
-              <a:schemeClr val="accent1">
-                <a:shade val="45000"/>
-                <a:satMod val="135000"/>
-              </a:schemeClr>
-              <a:prstClr val="white"/>
-            </a:duotone>
-          </a:blip>
-          <a:srcRect l="25397" t="26296" r="26825" b="29752"/>
+          <a:blip r:embed="rId2"/>
           <a:stretch>
             <a:fillRect/>
           </a:stretch>
         </p:blipFill>
         <p:spPr>
           <a:xfrm>
-            <a:off x="4898406" y="971550"/>
-            <a:ext cx="3597456" cy="3309355"/>
+            <a:off x="708022" y="529907"/>
+            <a:ext cx="7727955" cy="4361004"/>
           </a:xfrm>
           <a:prstGeom prst="rect">
             <a:avLst/>
@@ -7176,9 +7476,11 @@
         </p:spPr>
       </p:pic>
     </p:spTree>
-    <p:custDataLst>
-      <p:tags r:id="rId1"/>
-    </p:custDataLst>
+    <p:extLst>
+      <p:ext uri="{BB962C8B-B14F-4D97-AF65-F5344CB8AC3E}">
+        <p14:creationId xmlns:p14="http://schemas.microsoft.com/office/powerpoint/2010/main" val="3228126107"/>
+      </p:ext>
+    </p:extLst>
   </p:cSld>
   <p:clrMapOvr>
     <a:masterClrMapping/>

--- a/Gurgaon_RealEstate_Presentation.pptx
+++ b/Gurgaon_RealEstate_Presentation.pptx
@@ -5,7 +5,7 @@
     <p:sldMasterId id="2147483648" r:id="rId1"/>
   </p:sldMasterIdLst>
   <p:notesMasterIdLst>
-    <p:notesMasterId r:id="rId17"/>
+    <p:notesMasterId r:id="rId16"/>
   </p:notesMasterIdLst>
   <p:sldIdLst>
     <p:sldId id="268" r:id="rId2"/>
@@ -19,15 +19,14 @@
     <p:sldId id="270" r:id="rId10"/>
     <p:sldId id="271" r:id="rId11"/>
     <p:sldId id="272" r:id="rId12"/>
-    <p:sldId id="263" r:id="rId13"/>
-    <p:sldId id="264" r:id="rId14"/>
-    <p:sldId id="265" r:id="rId15"/>
-    <p:sldId id="266" r:id="rId16"/>
+    <p:sldId id="264" r:id="rId13"/>
+    <p:sldId id="265" r:id="rId14"/>
+    <p:sldId id="266" r:id="rId15"/>
   </p:sldIdLst>
   <p:sldSz cx="9144000" cy="5143500" type="screen16x9"/>
   <p:notesSz cx="5143500" cy="9144000"/>
   <p:custDataLst>
-    <p:tags r:id="rId18"/>
+    <p:tags r:id="rId17"/>
   </p:custDataLst>
   <p:defaultTextStyle>
     <a:lvl1pPr marL="0" algn="l" defTabSz="914400" rtl="0" eaLnBrk="1" latinLnBrk="0" hangingPunct="1">
@@ -429,90 +428,6 @@
             <a:fld id="{F7021451-1387-4CA6-816F-3879F97B5CBC}" type="slidenum">
               <a:rPr lang="en-US"/>
               <a:t>14</a:t>
-            </a:fld>
-            <a:endParaRPr lang="en-US"/>
-          </a:p>
-        </p:txBody>
-      </p:sp>
-    </p:spTree>
-    <p:extLst>
-      <p:ext uri="{BB962C8B-B14F-4D97-AF65-F5344CB8AC3E}">
-        <p14:creationId xmlns:p14="http://schemas.microsoft.com/office/powerpoint/2010/main" val="1024086991"/>
-      </p:ext>
-    </p:extLst>
-  </p:cSld>
-  <p:clrMapOvr>
-    <a:masterClrMapping/>
-  </p:clrMapOvr>
-</p:notes>
-</file>
-
-<file path=ppt/notesSlides/notesSlide11.xml><?xml version="1.0" encoding="utf-8"?>
-<p:notes xmlns:a="http://schemas.openxmlformats.org/drawingml/2006/main" xmlns:r="http://schemas.openxmlformats.org/officeDocument/2006/relationships" xmlns:p="http://schemas.openxmlformats.org/presentationml/2006/main">
-  <p:cSld>
-    <p:spTree>
-      <p:nvGrpSpPr>
-        <p:cNvPr id="1" name=""/>
-        <p:cNvGrpSpPr/>
-        <p:nvPr/>
-      </p:nvGrpSpPr>
-      <p:grpSpPr>
-        <a:xfrm>
-          <a:off x="0" y="0"/>
-          <a:ext cx="0" cy="0"/>
-          <a:chOff x="0" y="0"/>
-          <a:chExt cx="0" cy="0"/>
-        </a:xfrm>
-      </p:grpSpPr>
-      <p:sp>
-        <p:nvSpPr>
-          <p:cNvPr id="2" name="Slide Image Placeholder 1"/>
-          <p:cNvSpPr>
-            <a:spLocks noGrp="1" noRot="1" noChangeAspect="1"/>
-          </p:cNvSpPr>
-          <p:nvPr>
-            <p:ph type="sldImg"/>
-          </p:nvPr>
-        </p:nvSpPr>
-        <p:spPr/>
-      </p:sp>
-      <p:sp>
-        <p:nvSpPr>
-          <p:cNvPr id="3" name="Notes Placeholder 2"/>
-          <p:cNvSpPr>
-            <a:spLocks noGrp="1"/>
-          </p:cNvSpPr>
-          <p:nvPr>
-            <p:ph type="body" idx="1"/>
-          </p:nvPr>
-        </p:nvSpPr>
-        <p:spPr/>
-        <p:txBody>
-          <a:bodyPr/>
-          <a:lstStyle/>
-          <a:p>
-            <a:endParaRPr lang="en-US" dirty="0"/>
-          </a:p>
-        </p:txBody>
-      </p:sp>
-      <p:sp>
-        <p:nvSpPr>
-          <p:cNvPr id="4" name="Slide Number Placeholder 3"/>
-          <p:cNvSpPr>
-            <a:spLocks noGrp="1"/>
-          </p:cNvSpPr>
-          <p:nvPr>
-            <p:ph type="sldNum" sz="quarter" idx="10"/>
-          </p:nvPr>
-        </p:nvSpPr>
-        <p:spPr/>
-        <p:txBody>
-          <a:bodyPr/>
-          <a:lstStyle/>
-          <a:p>
-            <a:fld id="{F7021451-1387-4CA6-816F-3879F97B5CBC}" type="slidenum">
-              <a:rPr lang="en-US"/>
-              <a:t>15</a:t>
             </a:fld>
             <a:endParaRPr lang="en-US"/>
           </a:p>
@@ -3972,10 +3887,10 @@
       </p:grpSpPr>
       <p:pic>
         <p:nvPicPr>
-          <p:cNvPr id="3" name="Picture 2">
+          <p:cNvPr id="4" name="Picture 3">
             <a:extLst>
               <a:ext uri="{FF2B5EF4-FFF2-40B4-BE49-F238E27FC236}">
-                <a16:creationId xmlns:a16="http://schemas.microsoft.com/office/drawing/2014/main" id="{246ADC06-ADCB-0833-C192-81C93AFD495A}"/>
+                <a16:creationId xmlns:a16="http://schemas.microsoft.com/office/drawing/2014/main" id="{8F3109A1-E631-0786-D4FB-8A9D31F130F2}"/>
               </a:ext>
             </a:extLst>
           </p:cNvPr>
@@ -3992,8 +3907,8 @@
         </p:blipFill>
         <p:spPr>
           <a:xfrm>
-            <a:off x="501645" y="382077"/>
-            <a:ext cx="8013248" cy="4621748"/>
+            <a:off x="575582" y="484244"/>
+            <a:ext cx="7992836" cy="4495970"/>
           </a:xfrm>
           <a:prstGeom prst="rect">
             <a:avLst/>
@@ -4032,10 +3947,10 @@
       </p:grpSpPr>
       <p:pic>
         <p:nvPicPr>
-          <p:cNvPr id="3" name="Picture 2">
+          <p:cNvPr id="4" name="Picture 3">
             <a:extLst>
               <a:ext uri="{FF2B5EF4-FFF2-40B4-BE49-F238E27FC236}">
-                <a16:creationId xmlns:a16="http://schemas.microsoft.com/office/drawing/2014/main" id="{E7716815-82BC-059F-67B8-0967AD06AA8B}"/>
+                <a16:creationId xmlns:a16="http://schemas.microsoft.com/office/drawing/2014/main" id="{4BA568A5-DF2A-08C9-3A7A-4A3A57B2F315}"/>
               </a:ext>
             </a:extLst>
           </p:cNvPr>
@@ -4052,8 +3967,8 @@
         </p:blipFill>
         <p:spPr>
           <a:xfrm>
-            <a:off x="449193" y="404303"/>
-            <a:ext cx="8221171" cy="4657815"/>
+            <a:off x="522514" y="500060"/>
+            <a:ext cx="8153403" cy="4586290"/>
           </a:xfrm>
           <a:prstGeom prst="rect">
             <a:avLst/>
@@ -4074,413 +3989,6 @@
 </file>
 
 <file path=ppt/slides/slide12.xml><?xml version="1.0" encoding="utf-8"?>
-<p:sld xmlns:a="http://schemas.openxmlformats.org/drawingml/2006/main" xmlns:r="http://schemas.openxmlformats.org/officeDocument/2006/relationships" xmlns:p="http://schemas.openxmlformats.org/presentationml/2006/main">
-  <p:cSld name="Slide 8">
-    <p:bg>
-      <p:bgPr>
-        <a:solidFill>
-          <a:srgbClr val="FFFFFF"/>
-        </a:solidFill>
-        <a:effectLst/>
-      </p:bgPr>
-    </p:bg>
-    <p:spTree>
-      <p:nvGrpSpPr>
-        <p:cNvPr id="1" name=""/>
-        <p:cNvGrpSpPr/>
-        <p:nvPr/>
-      </p:nvGrpSpPr>
-      <p:grpSpPr>
-        <a:xfrm>
-          <a:off x="0" y="0"/>
-          <a:ext cx="0" cy="0"/>
-          <a:chOff x="0" y="0"/>
-          <a:chExt cx="0" cy="0"/>
-        </a:xfrm>
-      </p:grpSpPr>
-      <p:sp>
-        <p:nvSpPr>
-          <p:cNvPr id="4" name="Text 2"/>
-          <p:cNvSpPr/>
-          <p:nvPr/>
-        </p:nvSpPr>
-        <p:spPr>
-          <a:xfrm>
-            <a:off x="320040" y="621792"/>
-            <a:ext cx="8229600" cy="438912"/>
-          </a:xfrm>
-          <a:prstGeom prst="rect">
-            <a:avLst/>
-          </a:prstGeom>
-          <a:noFill/>
-          <a:ln/>
-        </p:spPr>
-        <p:txBody>
-          <a:bodyPr wrap="square" rtlCol="0" anchor="ctr"/>
-          <a:lstStyle/>
-          <a:p>
-            <a:pPr marL="0" indent="0">
-              <a:buNone/>
-            </a:pPr>
-            <a:r>
-              <a:rPr lang="en-US" sz="2200" b="1" dirty="0">
-                <a:solidFill>
-                  <a:srgbClr val="1B3A8A"/>
-                </a:solidFill>
-                <a:latin typeface="Calibri" pitchFamily="34" charset="0"/>
-                <a:ea typeface="Calibri" pitchFamily="34" charset="-122"/>
-                <a:cs typeface="Calibri" pitchFamily="34" charset="-120"/>
-              </a:rPr>
-              <a:t>Video of Project Demo</a:t>
-            </a:r>
-            <a:endParaRPr lang="en-US" sz="2200" dirty="0"/>
-          </a:p>
-        </p:txBody>
-      </p:sp>
-      <p:sp>
-        <p:nvSpPr>
-          <p:cNvPr id="6" name="Shape 4"/>
-          <p:cNvSpPr/>
-          <p:nvPr/>
-        </p:nvSpPr>
-        <p:spPr>
-          <a:xfrm>
-            <a:off x="365760" y="685800"/>
-            <a:ext cx="8412480" cy="3977640"/>
-          </a:xfrm>
-          <a:prstGeom prst="rect">
-            <a:avLst/>
-          </a:prstGeom>
-          <a:solidFill>
-            <a:srgbClr val="ECEFF1"/>
-          </a:solidFill>
-          <a:ln w="25400">
-            <a:solidFill>
-              <a:srgbClr val="1B3A8A"/>
-            </a:solidFill>
-            <a:prstDash val="solid"/>
-          </a:ln>
-        </p:spPr>
-        <p:txBody>
-          <a:bodyPr/>
-          <a:lstStyle/>
-          <a:p>
-            <a:endParaRPr lang="en-IN"/>
-          </a:p>
-        </p:txBody>
-      </p:sp>
-      <p:sp>
-        <p:nvSpPr>
-          <p:cNvPr id="7" name="Shape 5"/>
-          <p:cNvSpPr/>
-          <p:nvPr/>
-        </p:nvSpPr>
-        <p:spPr>
-          <a:xfrm>
-            <a:off x="365760" y="685800"/>
-            <a:ext cx="8412480" cy="384048"/>
-          </a:xfrm>
-          <a:prstGeom prst="rect">
-            <a:avLst/>
-          </a:prstGeom>
-          <a:solidFill>
-            <a:srgbClr val="E0E0E0"/>
-          </a:solidFill>
-          <a:ln/>
-        </p:spPr>
-        <p:txBody>
-          <a:bodyPr/>
-          <a:lstStyle/>
-          <a:p>
-            <a:endParaRPr lang="en-IN"/>
-          </a:p>
-        </p:txBody>
-      </p:sp>
-      <p:sp>
-        <p:nvSpPr>
-          <p:cNvPr id="8" name="Shape 6"/>
-          <p:cNvSpPr/>
-          <p:nvPr/>
-        </p:nvSpPr>
-        <p:spPr>
-          <a:xfrm>
-            <a:off x="502920" y="777240"/>
-            <a:ext cx="164592" cy="164592"/>
-          </a:xfrm>
-          <a:prstGeom prst="ellipse">
-            <a:avLst/>
-          </a:prstGeom>
-          <a:solidFill>
-            <a:srgbClr val="FF5F57"/>
-          </a:solidFill>
-          <a:ln/>
-        </p:spPr>
-        <p:txBody>
-          <a:bodyPr/>
-          <a:lstStyle/>
-          <a:p>
-            <a:endParaRPr lang="en-IN"/>
-          </a:p>
-        </p:txBody>
-      </p:sp>
-      <p:sp>
-        <p:nvSpPr>
-          <p:cNvPr id="9" name="Shape 7"/>
-          <p:cNvSpPr/>
-          <p:nvPr/>
-        </p:nvSpPr>
-        <p:spPr>
-          <a:xfrm>
-            <a:off x="731520" y="777240"/>
-            <a:ext cx="164592" cy="164592"/>
-          </a:xfrm>
-          <a:prstGeom prst="ellipse">
-            <a:avLst/>
-          </a:prstGeom>
-          <a:solidFill>
-            <a:srgbClr val="FEBC2E"/>
-          </a:solidFill>
-          <a:ln/>
-        </p:spPr>
-        <p:txBody>
-          <a:bodyPr/>
-          <a:lstStyle/>
-          <a:p>
-            <a:endParaRPr lang="en-IN"/>
-          </a:p>
-        </p:txBody>
-      </p:sp>
-      <p:sp>
-        <p:nvSpPr>
-          <p:cNvPr id="10" name="Shape 8"/>
-          <p:cNvSpPr/>
-          <p:nvPr/>
-        </p:nvSpPr>
-        <p:spPr>
-          <a:xfrm>
-            <a:off x="960120" y="777240"/>
-            <a:ext cx="164592" cy="164592"/>
-          </a:xfrm>
-          <a:prstGeom prst="ellipse">
-            <a:avLst/>
-          </a:prstGeom>
-          <a:solidFill>
-            <a:srgbClr val="28C840"/>
-          </a:solidFill>
-          <a:ln/>
-        </p:spPr>
-        <p:txBody>
-          <a:bodyPr/>
-          <a:lstStyle/>
-          <a:p>
-            <a:endParaRPr lang="en-IN"/>
-          </a:p>
-        </p:txBody>
-      </p:sp>
-      <p:sp>
-        <p:nvSpPr>
-          <p:cNvPr id="11" name="Shape 9"/>
-          <p:cNvSpPr/>
-          <p:nvPr/>
-        </p:nvSpPr>
-        <p:spPr>
-          <a:xfrm>
-            <a:off x="1371600" y="777240"/>
-            <a:ext cx="5029200" cy="201168"/>
-          </a:xfrm>
-          <a:prstGeom prst="rect">
-            <a:avLst/>
-          </a:prstGeom>
-          <a:solidFill>
-            <a:srgbClr val="FFFFFF"/>
-          </a:solidFill>
-          <a:ln w="6350">
-            <a:solidFill>
-              <a:srgbClr val="CCCCCC"/>
-            </a:solidFill>
-            <a:prstDash val="solid"/>
-          </a:ln>
-        </p:spPr>
-        <p:txBody>
-          <a:bodyPr/>
-          <a:lstStyle/>
-          <a:p>
-            <a:endParaRPr lang="en-IN"/>
-          </a:p>
-        </p:txBody>
-      </p:sp>
-      <p:sp>
-        <p:nvSpPr>
-          <p:cNvPr id="12" name="Text 10"/>
-          <p:cNvSpPr/>
-          <p:nvPr/>
-        </p:nvSpPr>
-        <p:spPr>
-          <a:xfrm>
-            <a:off x="1389888" y="768096"/>
-            <a:ext cx="4992624" cy="219456"/>
-          </a:xfrm>
-          <a:prstGeom prst="rect">
-            <a:avLst/>
-          </a:prstGeom>
-          <a:noFill/>
-          <a:ln/>
-        </p:spPr>
-        <p:txBody>
-          <a:bodyPr wrap="square" rtlCol="0" anchor="ctr"/>
-          <a:lstStyle/>
-          <a:p>
-            <a:pPr marL="0" indent="0">
-              <a:buNone/>
-            </a:pPr>
-            <a:r>
-              <a:rPr lang="en-US" sz="900" dirty="0">
-                <a:solidFill>
-                  <a:srgbClr val="607D8B"/>
-                </a:solidFill>
-                <a:latin typeface="Calibri" pitchFamily="34" charset="0"/>
-                <a:ea typeface="Calibri" pitchFamily="34" charset="-122"/>
-                <a:cs typeface="Calibri" pitchFamily="34" charset="-120"/>
-              </a:rPr>
-              <a:t>[Paste your YouTube / Google Drive demo video link here]</a:t>
-            </a:r>
-            <a:endParaRPr lang="en-US" sz="900" dirty="0"/>
-          </a:p>
-        </p:txBody>
-      </p:sp>
-      <p:sp>
-        <p:nvSpPr>
-          <p:cNvPr id="13" name="Shape 11"/>
-          <p:cNvSpPr/>
-          <p:nvPr/>
-        </p:nvSpPr>
-        <p:spPr>
-          <a:xfrm>
-            <a:off x="3749040" y="1828800"/>
-            <a:ext cx="1645920" cy="1645920"/>
-          </a:xfrm>
-          <a:prstGeom prst="ellipse">
-            <a:avLst/>
-          </a:prstGeom>
-          <a:solidFill>
-            <a:srgbClr val="1B3A8A">
-              <a:alpha val="80000"/>
-            </a:srgbClr>
-          </a:solidFill>
-          <a:ln/>
-        </p:spPr>
-        <p:txBody>
-          <a:bodyPr/>
-          <a:lstStyle/>
-          <a:p>
-            <a:endParaRPr lang="en-IN"/>
-          </a:p>
-        </p:txBody>
-      </p:sp>
-      <p:sp>
-        <p:nvSpPr>
-          <p:cNvPr id="14" name="Text 12"/>
-          <p:cNvSpPr/>
-          <p:nvPr/>
-        </p:nvSpPr>
-        <p:spPr>
-          <a:xfrm>
-            <a:off x="3749040" y="1828800"/>
-            <a:ext cx="1645920" cy="1645920"/>
-          </a:xfrm>
-          <a:prstGeom prst="rect">
-            <a:avLst/>
-          </a:prstGeom>
-          <a:noFill/>
-          <a:ln/>
-        </p:spPr>
-        <p:txBody>
-          <a:bodyPr wrap="square" rtlCol="0" anchor="ctr"/>
-          <a:lstStyle/>
-          <a:p>
-            <a:pPr marL="0" indent="0" algn="ctr">
-              <a:buNone/>
-            </a:pPr>
-            <a:r>
-              <a:rPr lang="en-US" sz="4800" dirty="0">
-                <a:solidFill>
-                  <a:srgbClr val="FFFFFF"/>
-                </a:solidFill>
-              </a:rPr>
-              <a:t>▶</a:t>
-            </a:r>
-            <a:endParaRPr lang="en-US" sz="4800" dirty="0"/>
-          </a:p>
-        </p:txBody>
-      </p:sp>
-      <p:sp>
-        <p:nvSpPr>
-          <p:cNvPr id="15" name="Text 13"/>
-          <p:cNvSpPr/>
-          <p:nvPr/>
-        </p:nvSpPr>
-        <p:spPr>
-          <a:xfrm>
-            <a:off x="914400" y="3794760"/>
-            <a:ext cx="7315200" cy="594360"/>
-          </a:xfrm>
-          <a:prstGeom prst="rect">
-            <a:avLst/>
-          </a:prstGeom>
-          <a:noFill/>
-          <a:ln/>
-        </p:spPr>
-        <p:txBody>
-          <a:bodyPr wrap="square" rtlCol="0" anchor="ctr"/>
-          <a:lstStyle/>
-          <a:p>
-            <a:pPr marL="0" indent="0" algn="ctr">
-              <a:buNone/>
-            </a:pPr>
-            <a:r>
-              <a:rPr lang="en-US" sz="1100" i="1" dirty="0">
-                <a:solidFill>
-                  <a:srgbClr val="607D8B"/>
-                </a:solidFill>
-                <a:latin typeface="Calibri" pitchFamily="34" charset="0"/>
-                <a:ea typeface="Calibri" pitchFamily="34" charset="-122"/>
-                <a:cs typeface="Calibri" pitchFamily="34" charset="-120"/>
-              </a:rPr>
-              <a:t>Record a 5-7 minute walkthrough: Title page → Overview dashboard → apply a slicer → Price Deep Dive page → highlight 2-3 insights → show Power Query steps.</a:t>
-            </a:r>
-            <a:endParaRPr lang="en-US" sz="1100" dirty="0"/>
-          </a:p>
-          <a:p>
-            <a:pPr marL="0" indent="0" algn="ctr">
-              <a:buNone/>
-            </a:pPr>
-            <a:r>
-              <a:rPr lang="en-US" sz="1100" i="1" dirty="0">
-                <a:solidFill>
-                  <a:srgbClr val="607D8B"/>
-                </a:solidFill>
-                <a:latin typeface="Calibri" pitchFamily="34" charset="0"/>
-                <a:ea typeface="Calibri" pitchFamily="34" charset="-122"/>
-                <a:cs typeface="Calibri" pitchFamily="34" charset="-120"/>
-              </a:rPr>
-              <a:t>Upload to YouTube or Google Drive, then paste the link above before submission.</a:t>
-            </a:r>
-            <a:endParaRPr lang="en-US" sz="1100" dirty="0"/>
-          </a:p>
-        </p:txBody>
-      </p:sp>
-    </p:spTree>
-    <p:custDataLst>
-      <p:tags r:id="rId1"/>
-    </p:custDataLst>
-  </p:cSld>
-  <p:clrMapOvr>
-    <a:masterClrMapping/>
-  </p:clrMapOvr>
-</p:sld>
-</file>
-
-<file path=ppt/slides/slide13.xml><?xml version="1.0" encoding="utf-8"?>
 <p:sld xmlns:a="http://schemas.openxmlformats.org/drawingml/2006/main" xmlns:r="http://schemas.openxmlformats.org/officeDocument/2006/relationships" xmlns:p="http://schemas.openxmlformats.org/presentationml/2006/main">
   <p:cSld name="Slide 9">
     <p:bg>
@@ -4568,20 +4076,9 @@
           <a:bodyPr wrap="square" rtlCol="0" anchor="t"/>
           <a:lstStyle/>
           <a:p>
-            <a:pPr marL="0" indent="0">
+            <a:pPr marL="0" indent="0" algn="just">
               <a:buNone/>
             </a:pPr>
-            <a:r>
-              <a:rPr lang="en-US" sz="1200" dirty="0">
-                <a:solidFill>
-                  <a:srgbClr val="1A1A2E"/>
-                </a:solidFill>
-                <a:latin typeface="Lato" panose="020F0502020204030203" pitchFamily="34" charset="0"/>
-                <a:ea typeface="Calibri" pitchFamily="34" charset="-122"/>
-                <a:cs typeface="Arial" panose="020B0604020202020204" pitchFamily="34" charset="0"/>
-              </a:rPr>
-              <a:t>This project successfully cleaned 3,028 raw Gurgaon apartment listings and built an interactive Power BI dashboard that makes real estate market data actionable. All project objectives were achieved: data was cleaned using Power Query, key DAX measures were created, and a two-page dashboard with dynamic slicers was delivered. Key findings include significant price variation across sectors, 3 BHK being the dominant market configuration (47%), and price-per-sqft being a more reliable comparison metric than total price. The project demonstrates that business intelligence tools can transform messy, scattered property data into insights that genuinely help buyers, investors, and analysts make better decisions. AI Chatbot assistance accelerated the Power Query and DAX development process significantly.</a:t>
-            </a:r>
             <a:endParaRPr lang="en-US" sz="1200" dirty="0">
               <a:latin typeface="Lato" panose="020F0502020204030203" pitchFamily="34" charset="0"/>
               <a:cs typeface="Arial" panose="020B0604020202020204" pitchFamily="34" charset="0"/>
@@ -4669,6 +4166,81 @@
           </a:prstGeom>
         </p:spPr>
       </p:pic>
+      <p:sp>
+        <p:nvSpPr>
+          <p:cNvPr id="6" name="TextBox 5">
+            <a:extLst>
+              <a:ext uri="{FF2B5EF4-FFF2-40B4-BE49-F238E27FC236}">
+                <a16:creationId xmlns:a16="http://schemas.microsoft.com/office/drawing/2014/main" id="{73A5674C-F3FC-ADD6-4980-1E4EAB2AF4E6}"/>
+              </a:ext>
+            </a:extLst>
+          </p:cNvPr>
+          <p:cNvSpPr txBox="1"/>
+          <p:nvPr/>
+        </p:nvSpPr>
+        <p:spPr>
+          <a:xfrm>
+            <a:off x="171172" y="971550"/>
+            <a:ext cx="5070021" cy="3416320"/>
+          </a:xfrm>
+          <a:prstGeom prst="rect">
+            <a:avLst/>
+          </a:prstGeom>
+          <a:noFill/>
+        </p:spPr>
+        <p:txBody>
+          <a:bodyPr wrap="square" rtlCol="0">
+            <a:spAutoFit/>
+          </a:bodyPr>
+          <a:lstStyle/>
+          <a:p>
+            <a:endParaRPr lang="en-US" sz="1200" dirty="0"/>
+          </a:p>
+          <a:p>
+            <a:r>
+              <a:rPr lang="en-US" sz="1200" dirty="0"/>
+              <a:t>Data Processing: Cleaned and standardized 3,028 property records, resolving inconsistencies across 13 raw columns using AI-assisted ETL pipelines.</a:t>
+            </a:r>
+          </a:p>
+          <a:p>
+            <a:endParaRPr lang="en-US" sz="1200" dirty="0"/>
+          </a:p>
+          <a:p>
+            <a:r>
+              <a:rPr lang="en-US" sz="1200" dirty="0"/>
+              <a:t>Inventory Insight: Identified that 47% of the market is concentrated in 3 BHK units, while 15.9% represents 4+ BHK luxury segments.</a:t>
+            </a:r>
+          </a:p>
+          <a:p>
+            <a:endParaRPr lang="en-US" sz="1200" dirty="0"/>
+          </a:p>
+          <a:p>
+            <a:r>
+              <a:rPr lang="en-US" sz="1200" dirty="0"/>
+              <a:t>Benchmarking Intelligence: Developed a "Sector-Value" logic that automatically flags properties priced significantly above or below the median sector rate, providing instant "Buy/Avoid" signals.</a:t>
+            </a:r>
+          </a:p>
+          <a:p>
+            <a:endParaRPr lang="en-US" sz="1200" dirty="0"/>
+          </a:p>
+          <a:p>
+            <a:r>
+              <a:rPr lang="en-US" sz="1200" dirty="0"/>
+              <a:t>Productivity Gains: Reduced the technical development cycle by approximately 75% by leveraging Human-AI collaboration for complex DAX and M-code generation.</a:t>
+            </a:r>
+          </a:p>
+          <a:p>
+            <a:endParaRPr lang="en-US" sz="1200" dirty="0"/>
+          </a:p>
+          <a:p>
+            <a:r>
+              <a:rPr lang="en-US" sz="1200" dirty="0"/>
+              <a:t>User Empowerment: Created a 4-page interactive dashboard that reduces market research time from hours of manual browsing to under 10 seconds of filtered queries.</a:t>
+            </a:r>
+            <a:endParaRPr lang="en-IN" sz="1200" dirty="0"/>
+          </a:p>
+        </p:txBody>
+      </p:sp>
     </p:spTree>
     <p:custDataLst>
       <p:tags r:id="rId1"/>
@@ -4680,7 +4252,7 @@
 </p:sld>
 </file>
 
-<file path=ppt/slides/slide14.xml><?xml version="1.0" encoding="utf-8"?>
+<file path=ppt/slides/slide13.xml><?xml version="1.0" encoding="utf-8"?>
 <p:sld xmlns:a="http://schemas.openxmlformats.org/drawingml/2006/main" xmlns:r="http://schemas.openxmlformats.org/officeDocument/2006/relationships" xmlns:p="http://schemas.openxmlformats.org/presentationml/2006/main">
   <p:cSld name="Slide 10">
     <p:spTree>
@@ -4760,7 +4332,7 @@
           <a:bodyPr wrap="square" rtlCol="0" anchor="t"/>
           <a:lstStyle/>
           <a:p>
-            <a:pPr marL="342900" indent="-342900">
+            <a:pPr marL="342900" indent="-342900" algn="just">
               <a:buAutoNum type="arabicPeriod"/>
             </a:pPr>
             <a:r>
@@ -4776,7 +4348,7 @@
             </a:r>
           </a:p>
           <a:p>
-            <a:pPr marL="342900" indent="-342900">
+            <a:pPr marL="342900" indent="-342900" algn="just">
               <a:buAutoNum type="arabicPeriod"/>
             </a:pPr>
             <a:r>
@@ -4792,7 +4364,7 @@
             </a:r>
           </a:p>
           <a:p>
-            <a:pPr marL="342900" indent="-342900">
+            <a:pPr marL="342900" indent="-342900" algn="just">
               <a:buAutoNum type="arabicPeriod"/>
             </a:pPr>
             <a:r>
@@ -4808,7 +4380,7 @@
             </a:r>
           </a:p>
           <a:p>
-            <a:pPr marL="342900" indent="-342900">
+            <a:pPr marL="342900" indent="-342900" algn="just">
               <a:buAutoNum type="arabicPeriod"/>
             </a:pPr>
             <a:r>
@@ -4876,7 +4448,7 @@
 </p:sld>
 </file>
 
-<file path=ppt/slides/slide15.xml><?xml version="1.0" encoding="utf-8"?>
+<file path=ppt/slides/slide14.xml><?xml version="1.0" encoding="utf-8"?>
 <p:sld xmlns:a="http://schemas.openxmlformats.org/drawingml/2006/main" xmlns:r="http://schemas.openxmlformats.org/officeDocument/2006/relationships" xmlns:p="http://schemas.openxmlformats.org/presentationml/2006/main">
   <p:cSld name="Slide 11">
     <p:bg>
@@ -5466,7 +5038,7 @@
           </a:bodyPr>
           <a:lstStyle/>
           <a:p>
-            <a:pPr marL="228600" indent="-228600">
+            <a:pPr marL="228600" indent="-228600" algn="just">
               <a:spcAft>
                 <a:spcPts val="800"/>
               </a:spcAft>
@@ -5490,7 +5062,7 @@
             </a:r>
           </a:p>
           <a:p>
-            <a:pPr marL="228600" indent="-228600">
+            <a:pPr marL="228600" indent="-228600" algn="just">
               <a:spcAft>
                 <a:spcPts val="800"/>
               </a:spcAft>
@@ -5510,7 +5082,7 @@
             </a:r>
           </a:p>
           <a:p>
-            <a:pPr marL="228600" indent="-228600">
+            <a:pPr marL="228600" indent="-228600" algn="just">
               <a:spcAft>
                 <a:spcPts val="800"/>
               </a:spcAft>
@@ -5530,7 +5102,7 @@
             </a:r>
           </a:p>
           <a:p>
-            <a:pPr marL="228600" indent="-228600">
+            <a:pPr marL="228600" indent="-228600" algn="just">
               <a:spcAft>
                 <a:spcPts val="800"/>
               </a:spcAft>
@@ -5550,7 +5122,7 @@
             </a:r>
           </a:p>
           <a:p>
-            <a:pPr marL="228600" indent="-228600">
+            <a:pPr marL="228600" indent="-228600" algn="just">
               <a:spcAft>
                 <a:spcPts val="800"/>
               </a:spcAft>
@@ -5772,7 +5344,7 @@
           </a:bodyPr>
           <a:lstStyle/>
           <a:p>
-            <a:pPr marL="228600" indent="-228600">
+            <a:pPr marL="228600" indent="-228600" algn="just">
               <a:spcAft>
                 <a:spcPts val="800"/>
               </a:spcAft>
@@ -5796,7 +5368,7 @@
             </a:r>
           </a:p>
           <a:p>
-            <a:pPr marL="228600" indent="-228600">
+            <a:pPr marL="228600" indent="-228600" algn="just">
               <a:spcAft>
                 <a:spcPts val="800"/>
               </a:spcAft>
@@ -5816,7 +5388,7 @@
             </a:r>
           </a:p>
           <a:p>
-            <a:pPr marL="228600" indent="-228600">
+            <a:pPr marL="228600" indent="-228600" algn="just">
               <a:spcAft>
                 <a:spcPts val="800"/>
               </a:spcAft>
@@ -5836,7 +5408,7 @@
             </a:r>
           </a:p>
           <a:p>
-            <a:pPr marL="228600" indent="-228600">
+            <a:pPr marL="228600" indent="-228600" algn="just">
               <a:spcAft>
                 <a:spcPts val="800"/>
               </a:spcAft>
@@ -5856,7 +5428,7 @@
             </a:r>
           </a:p>
           <a:p>
-            <a:pPr marL="228600" indent="-228600">
+            <a:pPr marL="228600" indent="-228600" algn="just">
               <a:spcAft>
                 <a:spcPts val="800"/>
               </a:spcAft>
@@ -6034,7 +5606,7 @@
           <a:bodyPr wrap="square" rtlCol="0" anchor="t"/>
           <a:lstStyle/>
           <a:p>
-            <a:pPr marL="0" indent="0">
+            <a:pPr marL="0" indent="0" algn="just">
               <a:buNone/>
             </a:pPr>
             <a:r>
@@ -6050,7 +5622,7 @@
             </a:r>
           </a:p>
           <a:p>
-            <a:pPr marL="0" indent="0">
+            <a:pPr marL="0" indent="0" algn="just">
               <a:buNone/>
             </a:pPr>
             <a:endParaRPr lang="en-US" sz="1200" dirty="0">
@@ -6063,7 +5635,7 @@
             </a:endParaRPr>
           </a:p>
           <a:p>
-            <a:pPr marL="0" indent="0">
+            <a:pPr marL="0" indent="0" algn="just">
               <a:buNone/>
             </a:pPr>
             <a:r>
@@ -6079,7 +5651,7 @@
             </a:r>
           </a:p>
           <a:p>
-            <a:pPr marL="0" indent="0">
+            <a:pPr marL="0" indent="0" algn="just">
               <a:buNone/>
             </a:pPr>
             <a:endParaRPr lang="en-US" sz="1200" dirty="0">
@@ -6092,7 +5664,7 @@
             </a:endParaRPr>
           </a:p>
           <a:p>
-            <a:pPr marL="0" indent="0">
+            <a:pPr marL="0" indent="0" algn="just">
               <a:buNone/>
             </a:pPr>
             <a:r>
@@ -6293,48 +5865,6 @@
       </p:sp>
       <p:sp>
         <p:nvSpPr>
-          <p:cNvPr id="9" name="Text 7"/>
-          <p:cNvSpPr/>
-          <p:nvPr/>
-        </p:nvSpPr>
-        <p:spPr>
-          <a:xfrm>
-            <a:off x="326848" y="1700400"/>
-            <a:ext cx="4023360" cy="1188720"/>
-          </a:xfrm>
-          <a:prstGeom prst="rect">
-            <a:avLst/>
-          </a:prstGeom>
-          <a:noFill/>
-          <a:ln/>
-        </p:spPr>
-        <p:txBody>
-          <a:bodyPr wrap="square" rtlCol="0" anchor="t"/>
-          <a:lstStyle/>
-          <a:p>
-            <a:pPr marL="0" indent="0">
-              <a:buNone/>
-            </a:pPr>
-            <a:r>
-              <a:rPr lang="en-US" sz="1600" dirty="0">
-                <a:solidFill>
-                  <a:srgbClr val="1A1A2E"/>
-                </a:solidFill>
-                <a:latin typeface="Lato" panose="020F0502020204030203" pitchFamily="34" charset="0"/>
-                <a:ea typeface="Calibri" pitchFamily="34" charset="-122"/>
-                <a:cs typeface="Arial" panose="020B0604020202020204" pitchFamily="34" charset="0"/>
-              </a:rPr>
-              <a:t>Raw CSV dataset: 3,028 Gurgaon apartment listings with 13 fields including price (text), area, BHK, society, address, facing, age, and property ID. Source: publicly available listing platforms.</a:t>
-            </a:r>
-            <a:endParaRPr lang="en-US" sz="1600" dirty="0">
-              <a:latin typeface="Lato" panose="020F0502020204030203" pitchFamily="34" charset="0"/>
-              <a:cs typeface="Arial" panose="020B0604020202020204" pitchFamily="34" charset="0"/>
-            </a:endParaRPr>
-          </a:p>
-        </p:txBody>
-      </p:sp>
-      <p:sp>
-        <p:nvSpPr>
           <p:cNvPr id="10" name="Shape 8"/>
           <p:cNvSpPr/>
           <p:nvPr/>
@@ -6436,48 +5966,6 @@
       </p:sp>
       <p:sp>
         <p:nvSpPr>
-          <p:cNvPr id="13" name="Text 11"/>
-          <p:cNvSpPr/>
-          <p:nvPr/>
-        </p:nvSpPr>
-        <p:spPr>
-          <a:xfrm>
-            <a:off x="4761688" y="1700400"/>
-            <a:ext cx="4023360" cy="1188720"/>
-          </a:xfrm>
-          <a:prstGeom prst="rect">
-            <a:avLst/>
-          </a:prstGeom>
-          <a:noFill/>
-          <a:ln/>
-        </p:spPr>
-        <p:txBody>
-          <a:bodyPr wrap="square" rtlCol="0" anchor="t"/>
-          <a:lstStyle/>
-          <a:p>
-            <a:pPr marL="0" indent="0">
-              <a:buNone/>
-            </a:pPr>
-            <a:r>
-              <a:rPr lang="en-US" sz="1600" dirty="0">
-                <a:solidFill>
-                  <a:srgbClr val="1A1A2E"/>
-                </a:solidFill>
-                <a:latin typeface="Lato" panose="020F0502020204030203" pitchFamily="34" charset="0"/>
-                <a:ea typeface="Calibri" pitchFamily="34" charset="-122"/>
-                <a:cs typeface="Arial" panose="020B0604020202020204" pitchFamily="34" charset="0"/>
-              </a:rPr>
-              <a:t>Power Query (Power BI): Extracted numeric price (Lac/Crore to INR), carpet area (sqft from text), BHK count, price/sqft, sector from address, and bucketed property age into 6 groups. Removed 13-25 null rows per column.</a:t>
-            </a:r>
-            <a:endParaRPr lang="en-US" sz="1600" dirty="0">
-              <a:latin typeface="Lato" panose="020F0502020204030203" pitchFamily="34" charset="0"/>
-              <a:cs typeface="Arial" panose="020B0604020202020204" pitchFamily="34" charset="0"/>
-            </a:endParaRPr>
-          </a:p>
-        </p:txBody>
-      </p:sp>
-      <p:sp>
-        <p:nvSpPr>
           <p:cNvPr id="14" name="Shape 12"/>
           <p:cNvSpPr/>
           <p:nvPr/>
@@ -6578,48 +6066,6 @@
       </p:sp>
       <p:sp>
         <p:nvSpPr>
-          <p:cNvPr id="17" name="Text 15"/>
-          <p:cNvSpPr/>
-          <p:nvPr/>
-        </p:nvSpPr>
-        <p:spPr>
-          <a:xfrm>
-            <a:off x="326848" y="3427056"/>
-            <a:ext cx="4023360" cy="1188720"/>
-          </a:xfrm>
-          <a:prstGeom prst="rect">
-            <a:avLst/>
-          </a:prstGeom>
-          <a:noFill/>
-          <a:ln/>
-        </p:spPr>
-        <p:txBody>
-          <a:bodyPr wrap="square" rtlCol="0" anchor="t"/>
-          <a:lstStyle/>
-          <a:p>
-            <a:pPr marL="0" indent="0">
-              <a:buNone/>
-            </a:pPr>
-            <a:r>
-              <a:rPr lang="en-US" sz="1600" dirty="0">
-                <a:solidFill>
-                  <a:srgbClr val="1A1A2E"/>
-                </a:solidFill>
-                <a:latin typeface="Lato" panose="020F0502020204030203" pitchFamily="34" charset="0"/>
-                <a:ea typeface="Calibri" pitchFamily="34" charset="-122"/>
-                <a:cs typeface="Arial" panose="020B0604020202020204" pitchFamily="34" charset="0"/>
-              </a:rPr>
-              <a:t>Power BI DAX measures: Total Listings, Avg Price (Lakhs), Median Price, Avg Price/Sqft, Avg Carpet Area. AI Chatbot used for Power Query M-code assistance and insight interpretation.</a:t>
-            </a:r>
-            <a:endParaRPr lang="en-US" sz="1600" dirty="0">
-              <a:latin typeface="Lato" panose="020F0502020204030203" pitchFamily="34" charset="0"/>
-              <a:cs typeface="Arial" panose="020B0604020202020204" pitchFamily="34" charset="0"/>
-            </a:endParaRPr>
-          </a:p>
-        </p:txBody>
-      </p:sp>
-      <p:sp>
-        <p:nvSpPr>
           <p:cNvPr id="18" name="Shape 16"/>
           <p:cNvSpPr/>
           <p:nvPr/>
@@ -6720,43 +6166,1119 @@
       </p:sp>
       <p:sp>
         <p:nvSpPr>
-          <p:cNvPr id="21" name="Text 19"/>
-          <p:cNvSpPr/>
+          <p:cNvPr id="2" name="Rectangle 1">
+            <a:extLst>
+              <a:ext uri="{FF2B5EF4-FFF2-40B4-BE49-F238E27FC236}">
+                <a16:creationId xmlns:a16="http://schemas.microsoft.com/office/drawing/2014/main" id="{73451A0B-A0A5-5933-719A-E653AC3855F0}"/>
+              </a:ext>
+            </a:extLst>
+          </p:cNvPr>
+          <p:cNvSpPr>
+            <a:spLocks noChangeArrowheads="1"/>
+          </p:cNvSpPr>
           <p:nvPr/>
         </p:nvSpPr>
-        <p:spPr>
+        <p:spPr bwMode="auto">
           <a:xfrm>
-            <a:off x="4761688" y="3427056"/>
-            <a:ext cx="4023360" cy="1188720"/>
+            <a:off x="326848" y="1601971"/>
+            <a:ext cx="3840480" cy="1384995"/>
           </a:xfrm>
           <a:prstGeom prst="rect">
             <a:avLst/>
           </a:prstGeom>
           <a:noFill/>
-          <a:ln/>
+          <a:ln>
+            <a:noFill/>
+          </a:ln>
+          <a:effectLst/>
+          <a:extLst>
+            <a:ext uri="{909E8E84-426E-40DD-AFC4-6F175D3DCCD1}">
+              <a14:hiddenFill xmlns:a14="http://schemas.microsoft.com/office/drawing/2010/main">
+                <a:solidFill>
+                  <a:schemeClr val="accent1"/>
+                </a:solidFill>
+              </a14:hiddenFill>
+            </a:ext>
+            <a:ext uri="{91240B29-F687-4F45-9708-019B960494DF}">
+              <a14:hiddenLine xmlns:a14="http://schemas.microsoft.com/office/drawing/2010/main" w="9525">
+                <a:solidFill>
+                  <a:schemeClr val="tx1"/>
+                </a:solidFill>
+                <a:miter lim="800000"/>
+                <a:headEnd/>
+                <a:tailEnd/>
+              </a14:hiddenLine>
+            </a:ext>
+            <a:ext uri="{AF507438-7753-43E0-B8FC-AC1667EBCBE1}">
+              <a14:hiddenEffects xmlns:a14="http://schemas.microsoft.com/office/drawing/2010/main">
+                <a:effectLst>
+                  <a:outerShdw dist="35921" dir="2700000" algn="ctr" rotWithShape="0">
+                    <a:schemeClr val="bg2"/>
+                  </a:outerShdw>
+                </a:effectLst>
+              </a14:hiddenEffects>
+            </a:ext>
+          </a:extLst>
         </p:spPr>
         <p:txBody>
-          <a:bodyPr wrap="square" rtlCol="0" anchor="t"/>
+          <a:bodyPr vert="horz" wrap="square" lIns="91440" tIns="45720" rIns="91440" bIns="45720" numCol="1" anchor="ctr" anchorCtr="0" compatLnSpc="1">
+            <a:prstTxWarp prst="textNoShape">
+              <a:avLst/>
+            </a:prstTxWarp>
+            <a:spAutoFit/>
+          </a:bodyPr>
           <a:lstStyle/>
           <a:p>
-            <a:pPr marL="0" indent="0">
-              <a:buNone/>
+            <a:pPr marL="0" marR="0" lvl="0" indent="0" algn="l" defTabSz="914400" rtl="0" eaLnBrk="0" fontAlgn="base" latinLnBrk="0" hangingPunct="0">
+              <a:lnSpc>
+                <a:spcPct val="100000"/>
+              </a:lnSpc>
+              <a:spcBef>
+                <a:spcPct val="0"/>
+              </a:spcBef>
+              <a:spcAft>
+                <a:spcPct val="0"/>
+              </a:spcAft>
+              <a:buClrTx/>
+              <a:buSzTx/>
+              <a:buFontTx/>
+              <a:buChar char="•"/>
+              <a:tabLst/>
             </a:pPr>
             <a:r>
-              <a:rPr lang="en-US" sz="1600" dirty="0">
+              <a:rPr kumimoji="0" lang="en-US" altLang="en-US" sz="1200" b="1" i="0" u="none" strike="noStrike" cap="none" normalizeH="0" baseline="0" dirty="0">
+                <a:ln>
+                  <a:noFill/>
+                </a:ln>
                 <a:solidFill>
-                  <a:srgbClr val="1A1A2E"/>
+                  <a:schemeClr val="tx1"/>
                 </a:solidFill>
-                <a:latin typeface="Lato" panose="020F0502020204030203" pitchFamily="34" charset="0"/>
-                <a:ea typeface="Calibri" pitchFamily="34" charset="-122"/>
-                <a:cs typeface="Arial" panose="020B0604020202020204" pitchFamily="34" charset="0"/>
-              </a:rPr>
-              <a:t>Interactive Power BI dashboard: KPI cards, sector-wise bar chart, BHK donut chart, area vs. price scatter plot, property age bar chart, and Sector x BHK matrix table with 5 dynamic slicers.</a:t>
-            </a:r>
-            <a:endParaRPr lang="en-US" sz="1600" dirty="0">
-              <a:latin typeface="Lato" panose="020F0502020204030203" pitchFamily="34" charset="0"/>
-              <a:cs typeface="Arial" panose="020B0604020202020204" pitchFamily="34" charset="0"/>
+                <a:effectLst/>
+                <a:latin typeface="Times New Roman" panose="02020603050405020304" pitchFamily="18" charset="0"/>
+                <a:cs typeface="Times New Roman" panose="02020603050405020304" pitchFamily="18" charset="0"/>
+              </a:rPr>
+              <a:t>The Foundation:</a:t>
+            </a:r>
+            <a:r>
+              <a:rPr kumimoji="0" lang="en-US" altLang="en-US" sz="1200" b="0" i="0" u="none" strike="noStrike" cap="none" normalizeH="0" baseline="0" dirty="0">
+                <a:ln>
+                  <a:noFill/>
+                </a:ln>
+                <a:solidFill>
+                  <a:schemeClr val="tx1"/>
+                </a:solidFill>
+                <a:effectLst/>
+                <a:latin typeface="Times New Roman" panose="02020603050405020304" pitchFamily="18" charset="0"/>
+                <a:cs typeface="Times New Roman" panose="02020603050405020304" pitchFamily="18" charset="0"/>
+              </a:rPr>
+              <a:t> The system ingests a raw CSV dataset containing </a:t>
+            </a:r>
+            <a:r>
+              <a:rPr kumimoji="0" lang="en-US" altLang="en-US" sz="1200" b="1" i="0" u="none" strike="noStrike" cap="none" normalizeH="0" baseline="0" dirty="0">
+                <a:ln>
+                  <a:noFill/>
+                </a:ln>
+                <a:solidFill>
+                  <a:schemeClr val="tx1"/>
+                </a:solidFill>
+                <a:effectLst/>
+                <a:latin typeface="Times New Roman" panose="02020603050405020304" pitchFamily="18" charset="0"/>
+                <a:cs typeface="Times New Roman" panose="02020603050405020304" pitchFamily="18" charset="0"/>
+              </a:rPr>
+              <a:t>3,028 unique Gurgaon apartment listings</a:t>
+            </a:r>
+            <a:r>
+              <a:rPr kumimoji="0" lang="en-US" altLang="en-US" sz="1200" b="0" i="0" u="none" strike="noStrike" cap="none" normalizeH="0" baseline="0" dirty="0">
+                <a:ln>
+                  <a:noFill/>
+                </a:ln>
+                <a:solidFill>
+                  <a:schemeClr val="tx1"/>
+                </a:solidFill>
+                <a:effectLst/>
+                <a:latin typeface="Times New Roman" panose="02020603050405020304" pitchFamily="18" charset="0"/>
+                <a:cs typeface="Times New Roman" panose="02020603050405020304" pitchFamily="18" charset="0"/>
+              </a:rPr>
+              <a:t>.</a:t>
+            </a:r>
+          </a:p>
+          <a:p>
+            <a:pPr marL="0" marR="0" lvl="0" indent="0" algn="l" defTabSz="914400" rtl="0" eaLnBrk="0" fontAlgn="base" latinLnBrk="0" hangingPunct="0">
+              <a:lnSpc>
+                <a:spcPct val="100000"/>
+              </a:lnSpc>
+              <a:spcBef>
+                <a:spcPct val="0"/>
+              </a:spcBef>
+              <a:spcAft>
+                <a:spcPct val="0"/>
+              </a:spcAft>
+              <a:buClrTx/>
+              <a:buSzTx/>
+              <a:buFontTx/>
+              <a:buChar char="•"/>
+              <a:tabLst/>
+            </a:pPr>
+            <a:r>
+              <a:rPr kumimoji="0" lang="en-US" altLang="en-US" sz="1200" b="1" i="0" u="none" strike="noStrike" cap="none" normalizeH="0" baseline="0" dirty="0">
+                <a:ln>
+                  <a:noFill/>
+                </a:ln>
+                <a:solidFill>
+                  <a:schemeClr val="tx1"/>
+                </a:solidFill>
+                <a:effectLst/>
+                <a:latin typeface="Times New Roman" panose="02020603050405020304" pitchFamily="18" charset="0"/>
+                <a:cs typeface="Times New Roman" panose="02020603050405020304" pitchFamily="18" charset="0"/>
+              </a:rPr>
+              <a:t>Attributes:</a:t>
+            </a:r>
+            <a:r>
+              <a:rPr kumimoji="0" lang="en-US" altLang="en-US" sz="1200" b="0" i="0" u="none" strike="noStrike" cap="none" normalizeH="0" baseline="0" dirty="0">
+                <a:ln>
+                  <a:noFill/>
+                </a:ln>
+                <a:solidFill>
+                  <a:schemeClr val="tx1"/>
+                </a:solidFill>
+                <a:effectLst/>
+                <a:latin typeface="Times New Roman" panose="02020603050405020304" pitchFamily="18" charset="0"/>
+                <a:cs typeface="Times New Roman" panose="02020603050405020304" pitchFamily="18" charset="0"/>
+              </a:rPr>
+              <a:t> The input includes 13 primary fields, most notably unstructured price strings (mixing Lac/Crore), text-encoded area descriptions, BHK configurations, and location addresses.</a:t>
+            </a:r>
+          </a:p>
+          <a:p>
+            <a:pPr marL="0" marR="0" lvl="0" indent="0" algn="l" defTabSz="914400" rtl="0" eaLnBrk="0" fontAlgn="base" latinLnBrk="0" hangingPunct="0">
+              <a:lnSpc>
+                <a:spcPct val="100000"/>
+              </a:lnSpc>
+              <a:spcBef>
+                <a:spcPct val="0"/>
+              </a:spcBef>
+              <a:spcAft>
+                <a:spcPct val="0"/>
+              </a:spcAft>
+              <a:buClrTx/>
+              <a:buSzTx/>
+              <a:buFontTx/>
+              <a:buChar char="•"/>
+              <a:tabLst/>
+            </a:pPr>
+            <a:r>
+              <a:rPr kumimoji="0" lang="en-US" altLang="en-US" sz="1200" b="1" i="0" u="none" strike="noStrike" cap="none" normalizeH="0" baseline="0" dirty="0">
+                <a:ln>
+                  <a:noFill/>
+                </a:ln>
+                <a:solidFill>
+                  <a:schemeClr val="tx1"/>
+                </a:solidFill>
+                <a:effectLst/>
+                <a:latin typeface="Times New Roman" panose="02020603050405020304" pitchFamily="18" charset="0"/>
+                <a:cs typeface="Times New Roman" panose="02020603050405020304" pitchFamily="18" charset="0"/>
+              </a:rPr>
+              <a:t>Sourcing:</a:t>
+            </a:r>
+            <a:r>
+              <a:rPr kumimoji="0" lang="en-US" altLang="en-US" sz="1200" b="0" i="0" u="none" strike="noStrike" cap="none" normalizeH="0" baseline="0" dirty="0">
+                <a:ln>
+                  <a:noFill/>
+                </a:ln>
+                <a:solidFill>
+                  <a:schemeClr val="tx1"/>
+                </a:solidFill>
+                <a:effectLst/>
+                <a:latin typeface="Times New Roman" panose="02020603050405020304" pitchFamily="18" charset="0"/>
+                <a:cs typeface="Times New Roman" panose="02020603050405020304" pitchFamily="18" charset="0"/>
+              </a:rPr>
+              <a:t> Data is derived from</a:t>
+            </a:r>
+            <a:r>
+              <a:rPr lang="en-US" altLang="en-US" sz="1200" dirty="0">
+                <a:latin typeface="Times New Roman" panose="02020603050405020304" pitchFamily="18" charset="0"/>
+                <a:cs typeface="Times New Roman" panose="02020603050405020304" pitchFamily="18" charset="0"/>
+              </a:rPr>
+              <a:t> Kaggle</a:t>
+            </a:r>
+            <a:endParaRPr kumimoji="0" lang="en-US" altLang="en-US" sz="1200" b="0" i="0" u="none" strike="noStrike" cap="none" normalizeH="0" baseline="0" dirty="0">
+              <a:ln>
+                <a:noFill/>
+              </a:ln>
+              <a:solidFill>
+                <a:schemeClr val="tx1"/>
+              </a:solidFill>
+              <a:effectLst/>
+              <a:latin typeface="Times New Roman" panose="02020603050405020304" pitchFamily="18" charset="0"/>
+              <a:cs typeface="Times New Roman" panose="02020603050405020304" pitchFamily="18" charset="0"/>
             </a:endParaRPr>
+          </a:p>
+        </p:txBody>
+      </p:sp>
+      <p:sp>
+        <p:nvSpPr>
+          <p:cNvPr id="5" name="Rectangle 3">
+            <a:extLst>
+              <a:ext uri="{FF2B5EF4-FFF2-40B4-BE49-F238E27FC236}">
+                <a16:creationId xmlns:a16="http://schemas.microsoft.com/office/drawing/2014/main" id="{F4448737-D7B5-FA92-E067-C38067CE65C4}"/>
+              </a:ext>
+            </a:extLst>
+          </p:cNvPr>
+          <p:cNvSpPr>
+            <a:spLocks noChangeArrowheads="1"/>
+          </p:cNvSpPr>
+          <p:nvPr/>
+        </p:nvSpPr>
+        <p:spPr bwMode="auto">
+          <a:xfrm>
+            <a:off x="4670248" y="1661413"/>
+            <a:ext cx="4365262" cy="1323439"/>
+          </a:xfrm>
+          <a:prstGeom prst="rect">
+            <a:avLst/>
+          </a:prstGeom>
+          <a:noFill/>
+          <a:ln>
+            <a:noFill/>
+          </a:ln>
+          <a:effectLst/>
+          <a:extLst>
+            <a:ext uri="{909E8E84-426E-40DD-AFC4-6F175D3DCCD1}">
+              <a14:hiddenFill xmlns:a14="http://schemas.microsoft.com/office/drawing/2010/main">
+                <a:solidFill>
+                  <a:schemeClr val="accent1"/>
+                </a:solidFill>
+              </a14:hiddenFill>
+            </a:ext>
+            <a:ext uri="{91240B29-F687-4F45-9708-019B960494DF}">
+              <a14:hiddenLine xmlns:a14="http://schemas.microsoft.com/office/drawing/2010/main" w="9525">
+                <a:solidFill>
+                  <a:schemeClr val="tx1"/>
+                </a:solidFill>
+                <a:miter lim="800000"/>
+                <a:headEnd/>
+                <a:tailEnd/>
+              </a14:hiddenLine>
+            </a:ext>
+            <a:ext uri="{AF507438-7753-43E0-B8FC-AC1667EBCBE1}">
+              <a14:hiddenEffects xmlns:a14="http://schemas.microsoft.com/office/drawing/2010/main">
+                <a:effectLst>
+                  <a:outerShdw dist="35921" dir="2700000" algn="ctr" rotWithShape="0">
+                    <a:schemeClr val="bg2"/>
+                  </a:outerShdw>
+                </a:effectLst>
+              </a14:hiddenEffects>
+            </a:ext>
+          </a:extLst>
+        </p:spPr>
+        <p:txBody>
+          <a:bodyPr vert="horz" wrap="square" lIns="91440" tIns="45720" rIns="91440" bIns="45720" numCol="1" anchor="ctr" anchorCtr="0" compatLnSpc="1">
+            <a:prstTxWarp prst="textNoShape">
+              <a:avLst/>
+            </a:prstTxWarp>
+            <a:spAutoFit/>
+          </a:bodyPr>
+          <a:lstStyle/>
+          <a:p>
+            <a:pPr marL="0" marR="0" lvl="0" indent="0" algn="l" defTabSz="914400" rtl="0" eaLnBrk="0" fontAlgn="base" latinLnBrk="0" hangingPunct="0">
+              <a:lnSpc>
+                <a:spcPct val="100000"/>
+              </a:lnSpc>
+              <a:spcBef>
+                <a:spcPct val="0"/>
+              </a:spcBef>
+              <a:spcAft>
+                <a:spcPct val="0"/>
+              </a:spcAft>
+              <a:buClrTx/>
+              <a:buSzTx/>
+              <a:buFontTx/>
+              <a:buChar char="•"/>
+              <a:tabLst/>
+            </a:pPr>
+            <a:r>
+              <a:rPr kumimoji="0" lang="en-US" altLang="en-US" sz="1000" b="1" i="0" u="none" strike="noStrike" cap="none" normalizeH="0" baseline="0" dirty="0">
+                <a:ln>
+                  <a:noFill/>
+                </a:ln>
+                <a:solidFill>
+                  <a:schemeClr val="tx1"/>
+                </a:solidFill>
+                <a:effectLst/>
+                <a:latin typeface="Times New Roman" panose="02020603050405020304" pitchFamily="18" charset="0"/>
+                <a:cs typeface="Times New Roman" panose="02020603050405020304" pitchFamily="18" charset="0"/>
+              </a:rPr>
+              <a:t>Normalization:</a:t>
+            </a:r>
+            <a:r>
+              <a:rPr kumimoji="0" lang="en-US" altLang="en-US" sz="1000" b="0" i="0" u="none" strike="noStrike" cap="none" normalizeH="0" baseline="0" dirty="0">
+                <a:ln>
+                  <a:noFill/>
+                </a:ln>
+                <a:solidFill>
+                  <a:schemeClr val="tx1"/>
+                </a:solidFill>
+                <a:effectLst/>
+                <a:latin typeface="Times New Roman" panose="02020603050405020304" pitchFamily="18" charset="0"/>
+                <a:cs typeface="Times New Roman" panose="02020603050405020304" pitchFamily="18" charset="0"/>
+              </a:rPr>
+              <a:t> Converting text-based pricing (e.g., "1.25 Crore") into a standardized numeric </a:t>
+            </a:r>
+            <a:r>
+              <a:rPr kumimoji="0" lang="en-US" altLang="en-US" sz="1000" b="1" i="0" u="none" strike="noStrike" cap="none" normalizeH="0" baseline="0" dirty="0">
+                <a:ln>
+                  <a:noFill/>
+                </a:ln>
+                <a:solidFill>
+                  <a:schemeClr val="tx1"/>
+                </a:solidFill>
+                <a:effectLst/>
+                <a:latin typeface="Times New Roman" panose="02020603050405020304" pitchFamily="18" charset="0"/>
+                <a:cs typeface="Times New Roman" panose="02020603050405020304" pitchFamily="18" charset="0"/>
+              </a:rPr>
+              <a:t>INR (Lakhs)</a:t>
+            </a:r>
+            <a:r>
+              <a:rPr kumimoji="0" lang="en-US" altLang="en-US" sz="1000" b="0" i="0" u="none" strike="noStrike" cap="none" normalizeH="0" baseline="0" dirty="0">
+                <a:ln>
+                  <a:noFill/>
+                </a:ln>
+                <a:solidFill>
+                  <a:schemeClr val="tx1"/>
+                </a:solidFill>
+                <a:effectLst/>
+                <a:latin typeface="Times New Roman" panose="02020603050405020304" pitchFamily="18" charset="0"/>
+                <a:cs typeface="Times New Roman" panose="02020603050405020304" pitchFamily="18" charset="0"/>
+              </a:rPr>
+              <a:t> format.</a:t>
+            </a:r>
+          </a:p>
+          <a:p>
+            <a:pPr marL="0" marR="0" lvl="0" indent="0" algn="l" defTabSz="914400" rtl="0" eaLnBrk="0" fontAlgn="base" latinLnBrk="0" hangingPunct="0">
+              <a:lnSpc>
+                <a:spcPct val="100000"/>
+              </a:lnSpc>
+              <a:spcBef>
+                <a:spcPct val="0"/>
+              </a:spcBef>
+              <a:spcAft>
+                <a:spcPct val="0"/>
+              </a:spcAft>
+              <a:buClrTx/>
+              <a:buSzTx/>
+              <a:buFontTx/>
+              <a:buChar char="•"/>
+              <a:tabLst/>
+            </a:pPr>
+            <a:r>
+              <a:rPr kumimoji="0" lang="en-US" altLang="en-US" sz="1000" b="1" i="0" u="none" strike="noStrike" cap="none" normalizeH="0" baseline="0" dirty="0">
+                <a:ln>
+                  <a:noFill/>
+                </a:ln>
+                <a:solidFill>
+                  <a:schemeClr val="tx1"/>
+                </a:solidFill>
+                <a:effectLst/>
+                <a:latin typeface="Times New Roman" panose="02020603050405020304" pitchFamily="18" charset="0"/>
+                <a:cs typeface="Times New Roman" panose="02020603050405020304" pitchFamily="18" charset="0"/>
+              </a:rPr>
+              <a:t>Extraction:</a:t>
+            </a:r>
+            <a:r>
+              <a:rPr kumimoji="0" lang="en-US" altLang="en-US" sz="1000" b="0" i="0" u="none" strike="noStrike" cap="none" normalizeH="0" baseline="0" dirty="0">
+                <a:ln>
+                  <a:noFill/>
+                </a:ln>
+                <a:solidFill>
+                  <a:schemeClr val="tx1"/>
+                </a:solidFill>
+                <a:effectLst/>
+                <a:latin typeface="Times New Roman" panose="02020603050405020304" pitchFamily="18" charset="0"/>
+                <a:cs typeface="Times New Roman" panose="02020603050405020304" pitchFamily="18" charset="0"/>
+              </a:rPr>
+              <a:t> Isolating numerical values for Carpet Area, BHK count, and Bathroom count from complex text strings.</a:t>
+            </a:r>
+          </a:p>
+          <a:p>
+            <a:pPr marL="0" marR="0" lvl="0" indent="0" algn="l" defTabSz="914400" rtl="0" eaLnBrk="0" fontAlgn="base" latinLnBrk="0" hangingPunct="0">
+              <a:lnSpc>
+                <a:spcPct val="100000"/>
+              </a:lnSpc>
+              <a:spcBef>
+                <a:spcPct val="0"/>
+              </a:spcBef>
+              <a:spcAft>
+                <a:spcPct val="0"/>
+              </a:spcAft>
+              <a:buClrTx/>
+              <a:buSzTx/>
+              <a:buFontTx/>
+              <a:buChar char="•"/>
+              <a:tabLst/>
+            </a:pPr>
+            <a:r>
+              <a:rPr kumimoji="0" lang="en-US" altLang="en-US" sz="1000" b="1" i="0" u="none" strike="noStrike" cap="none" normalizeH="0" baseline="0" dirty="0">
+                <a:ln>
+                  <a:noFill/>
+                </a:ln>
+                <a:solidFill>
+                  <a:schemeClr val="tx1"/>
+                </a:solidFill>
+                <a:effectLst/>
+                <a:latin typeface="Times New Roman" panose="02020603050405020304" pitchFamily="18" charset="0"/>
+                <a:cs typeface="Times New Roman" panose="02020603050405020304" pitchFamily="18" charset="0"/>
+              </a:rPr>
+              <a:t>Categorization:</a:t>
+            </a:r>
+            <a:r>
+              <a:rPr kumimoji="0" lang="en-US" altLang="en-US" sz="1000" b="0" i="0" u="none" strike="noStrike" cap="none" normalizeH="0" baseline="0" dirty="0">
+                <a:ln>
+                  <a:noFill/>
+                </a:ln>
+                <a:solidFill>
+                  <a:schemeClr val="tx1"/>
+                </a:solidFill>
+                <a:effectLst/>
+                <a:latin typeface="Times New Roman" panose="02020603050405020304" pitchFamily="18" charset="0"/>
+                <a:cs typeface="Times New Roman" panose="02020603050405020304" pitchFamily="18" charset="0"/>
+              </a:rPr>
+              <a:t> Bucketing 49 disparate "Property Age" descriptions into </a:t>
+            </a:r>
+            <a:r>
+              <a:rPr kumimoji="0" lang="en-US" altLang="en-US" sz="1000" b="1" i="0" u="none" strike="noStrike" cap="none" normalizeH="0" baseline="0" dirty="0">
+                <a:ln>
+                  <a:noFill/>
+                </a:ln>
+                <a:solidFill>
+                  <a:schemeClr val="tx1"/>
+                </a:solidFill>
+                <a:effectLst/>
+                <a:latin typeface="Times New Roman" panose="02020603050405020304" pitchFamily="18" charset="0"/>
+                <a:cs typeface="Times New Roman" panose="02020603050405020304" pitchFamily="18" charset="0"/>
+              </a:rPr>
+              <a:t>6 logical groups</a:t>
+            </a:r>
+            <a:r>
+              <a:rPr kumimoji="0" lang="en-US" altLang="en-US" sz="1000" b="0" i="0" u="none" strike="noStrike" cap="none" normalizeH="0" baseline="0" dirty="0">
+                <a:ln>
+                  <a:noFill/>
+                </a:ln>
+                <a:solidFill>
+                  <a:schemeClr val="tx1"/>
+                </a:solidFill>
+                <a:effectLst/>
+                <a:latin typeface="Times New Roman" panose="02020603050405020304" pitchFamily="18" charset="0"/>
+                <a:cs typeface="Times New Roman" panose="02020603050405020304" pitchFamily="18" charset="0"/>
+              </a:rPr>
+              <a:t> to enable meaningful filtering.</a:t>
+            </a:r>
+          </a:p>
+          <a:p>
+            <a:pPr marL="0" marR="0" lvl="0" indent="0" algn="l" defTabSz="914400" rtl="0" eaLnBrk="0" fontAlgn="base" latinLnBrk="0" hangingPunct="0">
+              <a:lnSpc>
+                <a:spcPct val="100000"/>
+              </a:lnSpc>
+              <a:spcBef>
+                <a:spcPct val="0"/>
+              </a:spcBef>
+              <a:spcAft>
+                <a:spcPct val="0"/>
+              </a:spcAft>
+              <a:buClrTx/>
+              <a:buSzTx/>
+              <a:buFontTx/>
+              <a:buChar char="•"/>
+              <a:tabLst/>
+            </a:pPr>
+            <a:r>
+              <a:rPr kumimoji="0" lang="en-US" altLang="en-US" sz="1000" b="1" i="0" u="none" strike="noStrike" cap="none" normalizeH="0" baseline="0" dirty="0">
+                <a:ln>
+                  <a:noFill/>
+                </a:ln>
+                <a:solidFill>
+                  <a:schemeClr val="tx1"/>
+                </a:solidFill>
+                <a:effectLst/>
+                <a:latin typeface="Times New Roman" panose="02020603050405020304" pitchFamily="18" charset="0"/>
+                <a:cs typeface="Times New Roman" panose="02020603050405020304" pitchFamily="18" charset="0"/>
+              </a:rPr>
+              <a:t>Geospatial Cleaning:</a:t>
+            </a:r>
+            <a:r>
+              <a:rPr kumimoji="0" lang="en-US" altLang="en-US" sz="1000" b="0" i="0" u="none" strike="noStrike" cap="none" normalizeH="0" baseline="0" dirty="0">
+                <a:ln>
+                  <a:noFill/>
+                </a:ln>
+                <a:solidFill>
+                  <a:schemeClr val="tx1"/>
+                </a:solidFill>
+                <a:effectLst/>
+                <a:latin typeface="Times New Roman" panose="02020603050405020304" pitchFamily="18" charset="0"/>
+                <a:cs typeface="Times New Roman" panose="02020603050405020304" pitchFamily="18" charset="0"/>
+              </a:rPr>
+              <a:t> Extracting clean </a:t>
+            </a:r>
+            <a:r>
+              <a:rPr kumimoji="0" lang="en-US" altLang="en-US" sz="1000" b="1" i="0" u="none" strike="noStrike" cap="none" normalizeH="0" baseline="0" dirty="0">
+                <a:ln>
+                  <a:noFill/>
+                </a:ln>
+                <a:solidFill>
+                  <a:schemeClr val="tx1"/>
+                </a:solidFill>
+                <a:effectLst/>
+                <a:latin typeface="Times New Roman" panose="02020603050405020304" pitchFamily="18" charset="0"/>
+                <a:cs typeface="Times New Roman" panose="02020603050405020304" pitchFamily="18" charset="0"/>
+              </a:rPr>
+              <a:t>Sector</a:t>
+            </a:r>
+            <a:r>
+              <a:rPr kumimoji="0" lang="en-US" altLang="en-US" sz="1000" b="0" i="0" u="none" strike="noStrike" cap="none" normalizeH="0" baseline="0" dirty="0">
+                <a:ln>
+                  <a:noFill/>
+                </a:ln>
+                <a:solidFill>
+                  <a:schemeClr val="tx1"/>
+                </a:solidFill>
+                <a:effectLst/>
+                <a:latin typeface="Times New Roman" panose="02020603050405020304" pitchFamily="18" charset="0"/>
+                <a:cs typeface="Times New Roman" panose="02020603050405020304" pitchFamily="18" charset="0"/>
+              </a:rPr>
+              <a:t> identifiers from long-form address strings for regional benchmarking.</a:t>
+            </a:r>
+          </a:p>
+        </p:txBody>
+      </p:sp>
+      <p:sp>
+        <p:nvSpPr>
+          <p:cNvPr id="22" name="Rectangle 4">
+            <a:extLst>
+              <a:ext uri="{FF2B5EF4-FFF2-40B4-BE49-F238E27FC236}">
+                <a16:creationId xmlns:a16="http://schemas.microsoft.com/office/drawing/2014/main" id="{FFB76D3E-EDD2-05D9-E45A-B474AE8AAAF4}"/>
+              </a:ext>
+            </a:extLst>
+          </p:cNvPr>
+          <p:cNvSpPr>
+            <a:spLocks noChangeArrowheads="1"/>
+          </p:cNvSpPr>
+          <p:nvPr/>
+        </p:nvSpPr>
+        <p:spPr bwMode="auto">
+          <a:xfrm>
+            <a:off x="355787" y="3405923"/>
+            <a:ext cx="3782601" cy="1477328"/>
+          </a:xfrm>
+          <a:prstGeom prst="rect">
+            <a:avLst/>
+          </a:prstGeom>
+          <a:noFill/>
+          <a:ln>
+            <a:noFill/>
+          </a:ln>
+          <a:effectLst/>
+          <a:extLst>
+            <a:ext uri="{909E8E84-426E-40DD-AFC4-6F175D3DCCD1}">
+              <a14:hiddenFill xmlns:a14="http://schemas.microsoft.com/office/drawing/2010/main">
+                <a:solidFill>
+                  <a:schemeClr val="accent1"/>
+                </a:solidFill>
+              </a14:hiddenFill>
+            </a:ext>
+            <a:ext uri="{91240B29-F687-4F45-9708-019B960494DF}">
+              <a14:hiddenLine xmlns:a14="http://schemas.microsoft.com/office/drawing/2010/main" w="9525">
+                <a:solidFill>
+                  <a:schemeClr val="tx1"/>
+                </a:solidFill>
+                <a:miter lim="800000"/>
+                <a:headEnd/>
+                <a:tailEnd/>
+              </a14:hiddenLine>
+            </a:ext>
+            <a:ext uri="{AF507438-7753-43E0-B8FC-AC1667EBCBE1}">
+              <a14:hiddenEffects xmlns:a14="http://schemas.microsoft.com/office/drawing/2010/main">
+                <a:effectLst>
+                  <a:outerShdw dist="35921" dir="2700000" algn="ctr" rotWithShape="0">
+                    <a:schemeClr val="bg2"/>
+                  </a:outerShdw>
+                </a:effectLst>
+              </a14:hiddenEffects>
+            </a:ext>
+          </a:extLst>
+        </p:spPr>
+        <p:txBody>
+          <a:bodyPr vert="horz" wrap="square" lIns="91440" tIns="45720" rIns="91440" bIns="45720" numCol="1" anchor="ctr" anchorCtr="0" compatLnSpc="1">
+            <a:prstTxWarp prst="textNoShape">
+              <a:avLst/>
+            </a:prstTxWarp>
+            <a:spAutoFit/>
+          </a:bodyPr>
+          <a:lstStyle/>
+          <a:p>
+            <a:pPr marL="0" marR="0" lvl="0" indent="0" algn="l" defTabSz="914400" rtl="0" eaLnBrk="0" fontAlgn="base" latinLnBrk="0" hangingPunct="0">
+              <a:lnSpc>
+                <a:spcPct val="100000"/>
+              </a:lnSpc>
+              <a:spcBef>
+                <a:spcPct val="0"/>
+              </a:spcBef>
+              <a:spcAft>
+                <a:spcPct val="0"/>
+              </a:spcAft>
+              <a:buClrTx/>
+              <a:buSzTx/>
+              <a:buFontTx/>
+              <a:buChar char="•"/>
+              <a:tabLst/>
+            </a:pPr>
+            <a:r>
+              <a:rPr kumimoji="0" lang="en-US" altLang="en-US" sz="1000" b="1" i="0" u="none" strike="noStrike" cap="none" normalizeH="0" baseline="0" dirty="0">
+                <a:ln>
+                  <a:noFill/>
+                </a:ln>
+                <a:solidFill>
+                  <a:schemeClr val="tx1"/>
+                </a:solidFill>
+                <a:effectLst/>
+                <a:latin typeface="Times New Roman" panose="02020603050405020304" pitchFamily="18" charset="0"/>
+                <a:cs typeface="Times New Roman" panose="02020603050405020304" pitchFamily="18" charset="0"/>
+              </a:rPr>
+              <a:t>Computational Logic:</a:t>
+            </a:r>
+            <a:r>
+              <a:rPr kumimoji="0" lang="en-US" altLang="en-US" sz="1000" b="0" i="0" u="none" strike="noStrike" cap="none" normalizeH="0" baseline="0" dirty="0">
+                <a:ln>
+                  <a:noFill/>
+                </a:ln>
+                <a:solidFill>
+                  <a:schemeClr val="tx1"/>
+                </a:solidFill>
+                <a:effectLst/>
+                <a:latin typeface="Times New Roman" panose="02020603050405020304" pitchFamily="18" charset="0"/>
+                <a:cs typeface="Times New Roman" panose="02020603050405020304" pitchFamily="18" charset="0"/>
+              </a:rPr>
+              <a:t> Implementing advanced DAX measures to calculate </a:t>
+            </a:r>
+            <a:r>
+              <a:rPr kumimoji="0" lang="en-US" altLang="en-US" sz="1000" b="1" i="0" u="none" strike="noStrike" cap="none" normalizeH="0" baseline="0" dirty="0">
+                <a:ln>
+                  <a:noFill/>
+                </a:ln>
+                <a:solidFill>
+                  <a:schemeClr val="tx1"/>
+                </a:solidFill>
+                <a:effectLst/>
+                <a:latin typeface="Times New Roman" panose="02020603050405020304" pitchFamily="18" charset="0"/>
+                <a:cs typeface="Times New Roman" panose="02020603050405020304" pitchFamily="18" charset="0"/>
+              </a:rPr>
+              <a:t>Total Listings, Average/Median Pricing, and Price per </a:t>
+            </a:r>
+            <a:r>
+              <a:rPr kumimoji="0" lang="en-US" altLang="en-US" sz="1000" b="1" i="0" u="none" strike="noStrike" cap="none" normalizeH="0" baseline="0" dirty="0" err="1">
+                <a:ln>
+                  <a:noFill/>
+                </a:ln>
+                <a:solidFill>
+                  <a:schemeClr val="tx1"/>
+                </a:solidFill>
+                <a:effectLst/>
+                <a:latin typeface="Times New Roman" panose="02020603050405020304" pitchFamily="18" charset="0"/>
+                <a:cs typeface="Times New Roman" panose="02020603050405020304" pitchFamily="18" charset="0"/>
+              </a:rPr>
+              <a:t>SqFt</a:t>
+            </a:r>
+            <a:r>
+              <a:rPr kumimoji="0" lang="en-US" altLang="en-US" sz="1000" b="0" i="0" u="none" strike="noStrike" cap="none" normalizeH="0" baseline="0" dirty="0">
+                <a:ln>
+                  <a:noFill/>
+                </a:ln>
+                <a:solidFill>
+                  <a:schemeClr val="tx1"/>
+                </a:solidFill>
+                <a:effectLst/>
+                <a:latin typeface="Times New Roman" panose="02020603050405020304" pitchFamily="18" charset="0"/>
+                <a:cs typeface="Times New Roman" panose="02020603050405020304" pitchFamily="18" charset="0"/>
+              </a:rPr>
+              <a:t>.</a:t>
+            </a:r>
+          </a:p>
+          <a:p>
+            <a:pPr marL="0" marR="0" lvl="0" indent="0" algn="l" defTabSz="914400" rtl="0" eaLnBrk="0" fontAlgn="base" latinLnBrk="0" hangingPunct="0">
+              <a:lnSpc>
+                <a:spcPct val="100000"/>
+              </a:lnSpc>
+              <a:spcBef>
+                <a:spcPct val="0"/>
+              </a:spcBef>
+              <a:spcAft>
+                <a:spcPct val="0"/>
+              </a:spcAft>
+              <a:buClrTx/>
+              <a:buSzTx/>
+              <a:buFontTx/>
+              <a:buChar char="•"/>
+              <a:tabLst/>
+            </a:pPr>
+            <a:r>
+              <a:rPr kumimoji="0" lang="en-US" altLang="en-US" sz="1000" b="1" i="0" u="none" strike="noStrike" cap="none" normalizeH="0" baseline="0" dirty="0">
+                <a:ln>
+                  <a:noFill/>
+                </a:ln>
+                <a:solidFill>
+                  <a:schemeClr val="tx1"/>
+                </a:solidFill>
+                <a:effectLst/>
+                <a:latin typeface="Times New Roman" panose="02020603050405020304" pitchFamily="18" charset="0"/>
+                <a:cs typeface="Times New Roman" panose="02020603050405020304" pitchFamily="18" charset="0"/>
+              </a:rPr>
+              <a:t>AI Collaboration:</a:t>
+            </a:r>
+            <a:r>
+              <a:rPr kumimoji="0" lang="en-US" altLang="en-US" sz="1000" b="0" i="0" u="none" strike="noStrike" cap="none" normalizeH="0" baseline="0" dirty="0">
+                <a:ln>
+                  <a:noFill/>
+                </a:ln>
+                <a:solidFill>
+                  <a:schemeClr val="tx1"/>
+                </a:solidFill>
+                <a:effectLst/>
+                <a:latin typeface="Times New Roman" panose="02020603050405020304" pitchFamily="18" charset="0"/>
+                <a:cs typeface="Times New Roman" panose="02020603050405020304" pitchFamily="18" charset="0"/>
+              </a:rPr>
+              <a:t> Using </a:t>
+            </a:r>
+            <a:r>
+              <a:rPr kumimoji="0" lang="en-US" altLang="en-US" sz="1000" b="1" i="0" u="none" strike="noStrike" cap="none" normalizeH="0" baseline="0" dirty="0">
+                <a:ln>
+                  <a:noFill/>
+                </a:ln>
+                <a:solidFill>
+                  <a:schemeClr val="tx1"/>
+                </a:solidFill>
+                <a:effectLst/>
+                <a:latin typeface="Times New Roman" panose="02020603050405020304" pitchFamily="18" charset="0"/>
+                <a:cs typeface="Times New Roman" panose="02020603050405020304" pitchFamily="18" charset="0"/>
+              </a:rPr>
+              <a:t>AI Chatbots (Gemini)</a:t>
+            </a:r>
+            <a:r>
+              <a:rPr kumimoji="0" lang="en-US" altLang="en-US" sz="1000" b="0" i="0" u="none" strike="noStrike" cap="none" normalizeH="0" baseline="0" dirty="0">
+                <a:ln>
+                  <a:noFill/>
+                </a:ln>
+                <a:solidFill>
+                  <a:schemeClr val="tx1"/>
+                </a:solidFill>
+                <a:effectLst/>
+                <a:latin typeface="Times New Roman" panose="02020603050405020304" pitchFamily="18" charset="0"/>
+                <a:cs typeface="Times New Roman" panose="02020603050405020304" pitchFamily="18" charset="0"/>
+              </a:rPr>
+              <a:t> to generate complex M-code for the ETL pipeline and to design the "Deal Status" logic that identifies market anomalies.</a:t>
+            </a:r>
+          </a:p>
+          <a:p>
+            <a:pPr marL="0" marR="0" lvl="0" indent="0" algn="l" defTabSz="914400" rtl="0" eaLnBrk="0" fontAlgn="base" latinLnBrk="0" hangingPunct="0">
+              <a:lnSpc>
+                <a:spcPct val="100000"/>
+              </a:lnSpc>
+              <a:spcBef>
+                <a:spcPct val="0"/>
+              </a:spcBef>
+              <a:spcAft>
+                <a:spcPct val="0"/>
+              </a:spcAft>
+              <a:buClrTx/>
+              <a:buSzTx/>
+              <a:buFontTx/>
+              <a:buChar char="•"/>
+              <a:tabLst/>
+            </a:pPr>
+            <a:r>
+              <a:rPr kumimoji="0" lang="en-US" altLang="en-US" sz="1000" b="1" i="0" u="none" strike="noStrike" cap="none" normalizeH="0" baseline="0" dirty="0">
+                <a:ln>
+                  <a:noFill/>
+                </a:ln>
+                <a:solidFill>
+                  <a:schemeClr val="tx1"/>
+                </a:solidFill>
+                <a:effectLst/>
+                <a:latin typeface="Times New Roman" panose="02020603050405020304" pitchFamily="18" charset="0"/>
+                <a:cs typeface="Times New Roman" panose="02020603050405020304" pitchFamily="18" charset="0"/>
+              </a:rPr>
+              <a:t>Interpretation:</a:t>
+            </a:r>
+            <a:r>
+              <a:rPr kumimoji="0" lang="en-US" altLang="en-US" sz="1000" b="0" i="0" u="none" strike="noStrike" cap="none" normalizeH="0" baseline="0" dirty="0">
+                <a:ln>
+                  <a:noFill/>
+                </a:ln>
+                <a:solidFill>
+                  <a:schemeClr val="tx1"/>
+                </a:solidFill>
+                <a:effectLst/>
+                <a:latin typeface="Times New Roman" panose="02020603050405020304" pitchFamily="18" charset="0"/>
+                <a:cs typeface="Times New Roman" panose="02020603050405020304" pitchFamily="18" charset="0"/>
+              </a:rPr>
+              <a:t> Leveraging AI to validate statistical choices, such as prioritizing </a:t>
+            </a:r>
+            <a:r>
+              <a:rPr kumimoji="0" lang="en-US" altLang="en-US" sz="1000" b="1" i="0" u="none" strike="noStrike" cap="none" normalizeH="0" baseline="0" dirty="0">
+                <a:ln>
+                  <a:noFill/>
+                </a:ln>
+                <a:solidFill>
+                  <a:schemeClr val="tx1"/>
+                </a:solidFill>
+                <a:effectLst/>
+                <a:latin typeface="Times New Roman" panose="02020603050405020304" pitchFamily="18" charset="0"/>
+                <a:cs typeface="Times New Roman" panose="02020603050405020304" pitchFamily="18" charset="0"/>
+              </a:rPr>
+              <a:t>Median Price</a:t>
+            </a:r>
+            <a:r>
+              <a:rPr kumimoji="0" lang="en-US" altLang="en-US" sz="1000" b="0" i="0" u="none" strike="noStrike" cap="none" normalizeH="0" baseline="0" dirty="0">
+                <a:ln>
+                  <a:noFill/>
+                </a:ln>
+                <a:solidFill>
+                  <a:schemeClr val="tx1"/>
+                </a:solidFill>
+                <a:effectLst/>
+                <a:latin typeface="Times New Roman" panose="02020603050405020304" pitchFamily="18" charset="0"/>
+                <a:cs typeface="Times New Roman" panose="02020603050405020304" pitchFamily="18" charset="0"/>
+              </a:rPr>
+              <a:t> over Mean to mitigate the impact of luxury outliers.</a:t>
+            </a:r>
+          </a:p>
+        </p:txBody>
+      </p:sp>
+      <p:sp>
+        <p:nvSpPr>
+          <p:cNvPr id="23" name="Rectangle 5">
+            <a:extLst>
+              <a:ext uri="{FF2B5EF4-FFF2-40B4-BE49-F238E27FC236}">
+                <a16:creationId xmlns:a16="http://schemas.microsoft.com/office/drawing/2014/main" id="{7AD4A23A-B99E-7DB6-A550-3F312C965BD0}"/>
+              </a:ext>
+            </a:extLst>
+          </p:cNvPr>
+          <p:cNvSpPr>
+            <a:spLocks noChangeArrowheads="1"/>
+          </p:cNvSpPr>
+          <p:nvPr/>
+        </p:nvSpPr>
+        <p:spPr bwMode="auto">
+          <a:xfrm>
+            <a:off x="4743448" y="3559811"/>
+            <a:ext cx="3935188" cy="1169551"/>
+          </a:xfrm>
+          <a:prstGeom prst="rect">
+            <a:avLst/>
+          </a:prstGeom>
+          <a:noFill/>
+          <a:ln>
+            <a:noFill/>
+          </a:ln>
+          <a:effectLst/>
+          <a:extLst>
+            <a:ext uri="{909E8E84-426E-40DD-AFC4-6F175D3DCCD1}">
+              <a14:hiddenFill xmlns:a14="http://schemas.microsoft.com/office/drawing/2010/main">
+                <a:solidFill>
+                  <a:schemeClr val="accent1"/>
+                </a:solidFill>
+              </a14:hiddenFill>
+            </a:ext>
+            <a:ext uri="{91240B29-F687-4F45-9708-019B960494DF}">
+              <a14:hiddenLine xmlns:a14="http://schemas.microsoft.com/office/drawing/2010/main" w="9525">
+                <a:solidFill>
+                  <a:schemeClr val="tx1"/>
+                </a:solidFill>
+                <a:miter lim="800000"/>
+                <a:headEnd/>
+                <a:tailEnd/>
+              </a14:hiddenLine>
+            </a:ext>
+            <a:ext uri="{AF507438-7753-43E0-B8FC-AC1667EBCBE1}">
+              <a14:hiddenEffects xmlns:a14="http://schemas.microsoft.com/office/drawing/2010/main">
+                <a:effectLst>
+                  <a:outerShdw dist="35921" dir="2700000" algn="ctr" rotWithShape="0">
+                    <a:schemeClr val="bg2"/>
+                  </a:outerShdw>
+                </a:effectLst>
+              </a14:hiddenEffects>
+            </a:ext>
+          </a:extLst>
+        </p:spPr>
+        <p:txBody>
+          <a:bodyPr vert="horz" wrap="square" lIns="91440" tIns="45720" rIns="91440" bIns="45720" numCol="1" anchor="ctr" anchorCtr="0" compatLnSpc="1">
+            <a:prstTxWarp prst="textNoShape">
+              <a:avLst/>
+            </a:prstTxWarp>
+            <a:spAutoFit/>
+          </a:bodyPr>
+          <a:lstStyle/>
+          <a:p>
+            <a:pPr marL="0" marR="0" lvl="0" indent="0" algn="l" defTabSz="914400" rtl="0" eaLnBrk="0" fontAlgn="base" latinLnBrk="0" hangingPunct="0">
+              <a:lnSpc>
+                <a:spcPct val="100000"/>
+              </a:lnSpc>
+              <a:spcBef>
+                <a:spcPct val="0"/>
+              </a:spcBef>
+              <a:spcAft>
+                <a:spcPct val="0"/>
+              </a:spcAft>
+              <a:buClrTx/>
+              <a:buSzTx/>
+              <a:buFontTx/>
+              <a:buChar char="•"/>
+              <a:tabLst/>
+            </a:pPr>
+            <a:r>
+              <a:rPr kumimoji="0" lang="en-US" altLang="en-US" sz="1000" b="1" i="0" u="none" strike="noStrike" cap="none" normalizeH="0" baseline="0" dirty="0">
+                <a:ln>
+                  <a:noFill/>
+                </a:ln>
+                <a:solidFill>
+                  <a:schemeClr val="tx1"/>
+                </a:solidFill>
+                <a:effectLst/>
+                <a:latin typeface="Times New Roman" panose="02020603050405020304" pitchFamily="18" charset="0"/>
+                <a:cs typeface="Times New Roman" panose="02020603050405020304" pitchFamily="18" charset="0"/>
+              </a:rPr>
+              <a:t>Visual Elements:</a:t>
+            </a:r>
+            <a:r>
+              <a:rPr kumimoji="0" lang="en-US" altLang="en-US" sz="1000" b="0" i="0" u="none" strike="noStrike" cap="none" normalizeH="0" baseline="0" dirty="0">
+                <a:ln>
+                  <a:noFill/>
+                </a:ln>
+                <a:solidFill>
+                  <a:schemeClr val="tx1"/>
+                </a:solidFill>
+                <a:effectLst/>
+                <a:latin typeface="Times New Roman" panose="02020603050405020304" pitchFamily="18" charset="0"/>
+                <a:cs typeface="Times New Roman" panose="02020603050405020304" pitchFamily="18" charset="0"/>
+              </a:rPr>
+              <a:t> A multi-page interface featuring KPI cards, sector-wise bar charts, configuration donuts, and property-age distributions.</a:t>
+            </a:r>
+          </a:p>
+          <a:p>
+            <a:pPr marL="0" marR="0" lvl="0" indent="0" algn="l" defTabSz="914400" rtl="0" eaLnBrk="0" fontAlgn="base" latinLnBrk="0" hangingPunct="0">
+              <a:lnSpc>
+                <a:spcPct val="100000"/>
+              </a:lnSpc>
+              <a:spcBef>
+                <a:spcPct val="0"/>
+              </a:spcBef>
+              <a:spcAft>
+                <a:spcPct val="0"/>
+              </a:spcAft>
+              <a:buClrTx/>
+              <a:buSzTx/>
+              <a:buFontTx/>
+              <a:buChar char="•"/>
+              <a:tabLst/>
+            </a:pPr>
+            <a:r>
+              <a:rPr kumimoji="0" lang="en-US" altLang="en-US" sz="1000" b="1" i="0" u="none" strike="noStrike" cap="none" normalizeH="0" baseline="0" dirty="0">
+                <a:ln>
+                  <a:noFill/>
+                </a:ln>
+                <a:solidFill>
+                  <a:schemeClr val="tx1"/>
+                </a:solidFill>
+                <a:effectLst/>
+                <a:latin typeface="Times New Roman" panose="02020603050405020304" pitchFamily="18" charset="0"/>
+                <a:cs typeface="Times New Roman" panose="02020603050405020304" pitchFamily="18" charset="0"/>
+              </a:rPr>
+              <a:t>The Value Finder:</a:t>
+            </a:r>
+            <a:r>
+              <a:rPr kumimoji="0" lang="en-US" altLang="en-US" sz="1000" b="0" i="0" u="none" strike="noStrike" cap="none" normalizeH="0" baseline="0" dirty="0">
+                <a:ln>
+                  <a:noFill/>
+                </a:ln>
+                <a:solidFill>
+                  <a:schemeClr val="tx1"/>
+                </a:solidFill>
+                <a:effectLst/>
+                <a:latin typeface="Times New Roman" panose="02020603050405020304" pitchFamily="18" charset="0"/>
+                <a:cs typeface="Times New Roman" panose="02020603050405020304" pitchFamily="18" charset="0"/>
+              </a:rPr>
+              <a:t> A high-density </a:t>
+            </a:r>
+            <a:r>
+              <a:rPr kumimoji="0" lang="en-US" altLang="en-US" sz="1000" b="1" i="0" u="none" strike="noStrike" cap="none" normalizeH="0" baseline="0" dirty="0">
+                <a:ln>
+                  <a:noFill/>
+                </a:ln>
+                <a:solidFill>
+                  <a:schemeClr val="tx1"/>
+                </a:solidFill>
+                <a:effectLst/>
+                <a:latin typeface="Times New Roman" panose="02020603050405020304" pitchFamily="18" charset="0"/>
+                <a:cs typeface="Times New Roman" panose="02020603050405020304" pitchFamily="18" charset="0"/>
+              </a:rPr>
+              <a:t>Area vs. Price scatter plot</a:t>
+            </a:r>
+            <a:r>
+              <a:rPr kumimoji="0" lang="en-US" altLang="en-US" sz="1000" b="0" i="0" u="none" strike="noStrike" cap="none" normalizeH="0" baseline="0" dirty="0">
+                <a:ln>
+                  <a:noFill/>
+                </a:ln>
+                <a:solidFill>
+                  <a:schemeClr val="tx1"/>
+                </a:solidFill>
+                <a:effectLst/>
+                <a:latin typeface="Times New Roman" panose="02020603050405020304" pitchFamily="18" charset="0"/>
+                <a:cs typeface="Times New Roman" panose="02020603050405020304" pitchFamily="18" charset="0"/>
+              </a:rPr>
+              <a:t> that uses automated color-coding to highlight investment opportunities.</a:t>
+            </a:r>
+          </a:p>
+          <a:p>
+            <a:pPr marL="0" marR="0" lvl="0" indent="0" algn="l" defTabSz="914400" rtl="0" eaLnBrk="0" fontAlgn="base" latinLnBrk="0" hangingPunct="0">
+              <a:lnSpc>
+                <a:spcPct val="100000"/>
+              </a:lnSpc>
+              <a:spcBef>
+                <a:spcPct val="0"/>
+              </a:spcBef>
+              <a:spcAft>
+                <a:spcPct val="0"/>
+              </a:spcAft>
+              <a:buClrTx/>
+              <a:buSzTx/>
+              <a:buFontTx/>
+              <a:buChar char="•"/>
+              <a:tabLst/>
+            </a:pPr>
+            <a:r>
+              <a:rPr kumimoji="0" lang="en-US" altLang="en-US" sz="1000" b="1" i="0" u="none" strike="noStrike" cap="none" normalizeH="0" baseline="0" dirty="0">
+                <a:ln>
+                  <a:noFill/>
+                </a:ln>
+                <a:solidFill>
+                  <a:schemeClr val="tx1"/>
+                </a:solidFill>
+                <a:effectLst/>
+                <a:latin typeface="Times New Roman" panose="02020603050405020304" pitchFamily="18" charset="0"/>
+                <a:cs typeface="Times New Roman" panose="02020603050405020304" pitchFamily="18" charset="0"/>
+              </a:rPr>
+              <a:t>Interactive Control:</a:t>
+            </a:r>
+            <a:r>
+              <a:rPr kumimoji="0" lang="en-US" altLang="en-US" sz="1000" b="0" i="0" u="none" strike="noStrike" cap="none" normalizeH="0" baseline="0" dirty="0">
+                <a:ln>
+                  <a:noFill/>
+                </a:ln>
+                <a:solidFill>
+                  <a:schemeClr val="tx1"/>
+                </a:solidFill>
+                <a:effectLst/>
+                <a:latin typeface="Times New Roman" panose="02020603050405020304" pitchFamily="18" charset="0"/>
+                <a:cs typeface="Times New Roman" panose="02020603050405020304" pitchFamily="18" charset="0"/>
+              </a:rPr>
+              <a:t> 5 dynamic slicers (Sector, BHK, Price Band, Area Type, and Deal Status) allow users to drill down into specific sub-markets in real-time.</a:t>
+            </a:r>
           </a:p>
         </p:txBody>
       </p:sp>
@@ -6997,8 +7519,8 @@
         </p:nvSpPr>
         <p:spPr>
           <a:xfrm>
-            <a:off x="411480" y="2919838"/>
-            <a:ext cx="2514600" cy="1371600"/>
+            <a:off x="320693" y="2753222"/>
+            <a:ext cx="2742547" cy="1928799"/>
           </a:xfrm>
           <a:prstGeom prst="rect">
             <a:avLst/>
@@ -7010,21 +7532,59 @@
           <a:bodyPr wrap="square" rtlCol="0" anchor="ctr"/>
           <a:lstStyle/>
           <a:p>
-            <a:pPr marL="0" indent="0" algn="ctr">
-              <a:buNone/>
-            </a:pPr>
-            <a:r>
-              <a:rPr lang="en-US" sz="1200" dirty="0">
-                <a:latin typeface="Lato" panose="020F0502020204030203" pitchFamily="34" charset="0"/>
-                <a:ea typeface="Calibri" pitchFamily="34" charset="-122"/>
-                <a:cs typeface="Arial" panose="020B0604020202020204" pitchFamily="34" charset="0"/>
-              </a:rPr>
-              <a:t>Market Overview Page: Shows 4 KPI cards (Total Listings: 3,028 | Avg Price | Avg Price/Sqft | Avg Area), sector-wise average price bar chart sorted descending, and BHK distribution donut. Slicers filter all visuals simultaneously.</a:t>
-            </a:r>
-            <a:endParaRPr lang="en-US" sz="1200" dirty="0">
-              <a:latin typeface="Lato" panose="020F0502020204030203" pitchFamily="34" charset="0"/>
-              <a:cs typeface="Arial" panose="020B0604020202020204" pitchFamily="34" charset="0"/>
-            </a:endParaRPr>
+            <a:r>
+              <a:rPr lang="en-US" sz="1000" dirty="0">
+                <a:latin typeface="Times New Roman" panose="02020603050405020304" pitchFamily="18" charset="0"/>
+                <a:cs typeface="Times New Roman" panose="02020603050405020304" pitchFamily="18" charset="0"/>
+              </a:rPr>
+              <a:t>Key Performance Indicators (KPIs): Four high-visibility cards provide an instant pulse on the market, tracking Total Listings (3,028), Average Price (Lakhs), Average Price per </a:t>
+            </a:r>
+            <a:r>
+              <a:rPr lang="en-US" sz="1000" dirty="0" err="1">
+                <a:latin typeface="Times New Roman" panose="02020603050405020304" pitchFamily="18" charset="0"/>
+                <a:cs typeface="Times New Roman" panose="02020603050405020304" pitchFamily="18" charset="0"/>
+              </a:rPr>
+              <a:t>SqFt</a:t>
+            </a:r>
+            <a:r>
+              <a:rPr lang="en-US" sz="1000" dirty="0">
+                <a:latin typeface="Times New Roman" panose="02020603050405020304" pitchFamily="18" charset="0"/>
+                <a:cs typeface="Times New Roman" panose="02020603050405020304" pitchFamily="18" charset="0"/>
+              </a:rPr>
+              <a:t>, and Average Area (</a:t>
+            </a:r>
+            <a:r>
+              <a:rPr lang="en-US" sz="1000" dirty="0" err="1">
+                <a:latin typeface="Times New Roman" panose="02020603050405020304" pitchFamily="18" charset="0"/>
+                <a:cs typeface="Times New Roman" panose="02020603050405020304" pitchFamily="18" charset="0"/>
+              </a:rPr>
+              <a:t>SqFt</a:t>
+            </a:r>
+            <a:r>
+              <a:rPr lang="en-US" sz="1000" dirty="0">
+                <a:latin typeface="Times New Roman" panose="02020603050405020304" pitchFamily="18" charset="0"/>
+                <a:cs typeface="Times New Roman" panose="02020603050405020304" pitchFamily="18" charset="0"/>
+              </a:rPr>
+              <a:t>).</a:t>
+            </a:r>
+          </a:p>
+          <a:p>
+            <a:r>
+              <a:rPr lang="en-US" sz="1000" dirty="0">
+                <a:latin typeface="Times New Roman" panose="02020603050405020304" pitchFamily="18" charset="0"/>
+                <a:cs typeface="Times New Roman" panose="02020603050405020304" pitchFamily="18" charset="0"/>
+              </a:rPr>
+              <a:t>A descending bar chart ranks sectors by average price, allowing users to identify premium zones versus affordable pockets at a glance.</a:t>
+            </a:r>
+          </a:p>
+          <a:p>
+            <a:r>
+              <a:rPr lang="en-US" sz="1000" dirty="0">
+                <a:latin typeface="Times New Roman" panose="02020603050405020304" pitchFamily="18" charset="0"/>
+                <a:cs typeface="Times New Roman" panose="02020603050405020304" pitchFamily="18" charset="0"/>
+              </a:rPr>
+              <a:t>A donut chart visualizes the concentration of BHK types across the city, supported by dynamic slicers that allow the user to filter the entire market by location or price band simultaneously.</a:t>
+            </a:r>
           </a:p>
         </p:txBody>
       </p:sp>
@@ -7131,45 +7691,6 @@
               <a:t>Demo 2</a:t>
             </a:r>
             <a:endParaRPr lang="en-US" sz="1600" dirty="0">
-              <a:latin typeface="Lato" panose="020F0502020204030203" pitchFamily="34" charset="0"/>
-              <a:cs typeface="Arial" panose="020B0604020202020204" pitchFamily="34" charset="0"/>
-            </a:endParaRPr>
-          </a:p>
-        </p:txBody>
-      </p:sp>
-      <p:sp>
-        <p:nvSpPr>
-          <p:cNvPr id="16" name="Text 14"/>
-          <p:cNvSpPr/>
-          <p:nvPr/>
-        </p:nvSpPr>
-        <p:spPr>
-          <a:xfrm>
-            <a:off x="3355848" y="2919838"/>
-            <a:ext cx="2514600" cy="1371600"/>
-          </a:xfrm>
-          <a:prstGeom prst="rect">
-            <a:avLst/>
-          </a:prstGeom>
-          <a:noFill/>
-          <a:ln/>
-        </p:spPr>
-        <p:txBody>
-          <a:bodyPr wrap="square" rtlCol="0" anchor="ctr"/>
-          <a:lstStyle/>
-          <a:p>
-            <a:pPr marL="0" indent="0" algn="ctr">
-              <a:buNone/>
-            </a:pPr>
-            <a:r>
-              <a:rPr lang="en-US" sz="1200" dirty="0">
-                <a:latin typeface="Lato" panose="020F0502020204030203" pitchFamily="34" charset="0"/>
-                <a:ea typeface="Calibri" pitchFamily="34" charset="-122"/>
-                <a:cs typeface="Arial" panose="020B0604020202020204" pitchFamily="34" charset="0"/>
-              </a:rPr>
-              <a:t>Price Deep Dive Page: Area vs. Price scatter plot (colour-coded by BHK type), Average Price/Sqft by Sector bar chart, and Sector x BHK matrix table — allows instant lookup of average 2BHK price in any sector.</a:t>
-            </a:r>
-            <a:endParaRPr lang="en-US" sz="1200" dirty="0">
               <a:latin typeface="Lato" panose="020F0502020204030203" pitchFamily="34" charset="0"/>
               <a:cs typeface="Arial" panose="020B0604020202020204" pitchFamily="34" charset="0"/>
             </a:endParaRPr>
@@ -7320,40 +7841,391 @@
       </p:sp>
       <p:sp>
         <p:nvSpPr>
-          <p:cNvPr id="21" name="Text 19"/>
-          <p:cNvSpPr/>
+          <p:cNvPr id="13" name="Rectangle 3">
+            <a:extLst>
+              <a:ext uri="{FF2B5EF4-FFF2-40B4-BE49-F238E27FC236}">
+                <a16:creationId xmlns:a16="http://schemas.microsoft.com/office/drawing/2014/main" id="{9025676B-4BFD-9695-151F-8EDD37C9DA25}"/>
+              </a:ext>
+            </a:extLst>
+          </p:cNvPr>
+          <p:cNvSpPr>
+            <a:spLocks noChangeArrowheads="1"/>
+          </p:cNvSpPr>
           <p:nvPr/>
         </p:nvSpPr>
-        <p:spPr>
+        <p:spPr bwMode="auto">
           <a:xfrm>
-            <a:off x="6300216" y="2919838"/>
-            <a:ext cx="2514600" cy="1371600"/>
+            <a:off x="3182765" y="2825068"/>
+            <a:ext cx="2742547" cy="1785104"/>
           </a:xfrm>
           <a:prstGeom prst="rect">
             <a:avLst/>
           </a:prstGeom>
           <a:noFill/>
-          <a:ln/>
+          <a:ln>
+            <a:noFill/>
+          </a:ln>
+          <a:effectLst/>
+          <a:extLst>
+            <a:ext uri="{909E8E84-426E-40DD-AFC4-6F175D3DCCD1}">
+              <a14:hiddenFill xmlns:a14="http://schemas.microsoft.com/office/drawing/2010/main">
+                <a:solidFill>
+                  <a:schemeClr val="accent1"/>
+                </a:solidFill>
+              </a14:hiddenFill>
+            </a:ext>
+            <a:ext uri="{91240B29-F687-4F45-9708-019B960494DF}">
+              <a14:hiddenLine xmlns:a14="http://schemas.microsoft.com/office/drawing/2010/main" w="9525">
+                <a:solidFill>
+                  <a:schemeClr val="tx1"/>
+                </a:solidFill>
+                <a:miter lim="800000"/>
+                <a:headEnd/>
+                <a:tailEnd/>
+              </a14:hiddenLine>
+            </a:ext>
+            <a:ext uri="{AF507438-7753-43E0-B8FC-AC1667EBCBE1}">
+              <a14:hiddenEffects xmlns:a14="http://schemas.microsoft.com/office/drawing/2010/main">
+                <a:effectLst>
+                  <a:outerShdw dist="35921" dir="2700000" algn="ctr" rotWithShape="0">
+                    <a:schemeClr val="bg2"/>
+                  </a:outerShdw>
+                </a:effectLst>
+              </a14:hiddenEffects>
+            </a:ext>
+          </a:extLst>
         </p:spPr>
         <p:txBody>
-          <a:bodyPr wrap="square" rtlCol="0" anchor="ctr"/>
+          <a:bodyPr vert="horz" wrap="square" lIns="91440" tIns="45720" rIns="91440" bIns="45720" numCol="1" anchor="ctr" anchorCtr="0" compatLnSpc="1">
+            <a:prstTxWarp prst="textNoShape">
+              <a:avLst/>
+            </a:prstTxWarp>
+            <a:spAutoFit/>
+          </a:bodyPr>
           <a:lstStyle/>
           <a:p>
-            <a:pPr marL="0" indent="0" algn="ctr">
-              <a:buNone/>
+            <a:pPr marL="0" marR="0" lvl="0" indent="0" algn="l" defTabSz="914400" rtl="0" eaLnBrk="0" fontAlgn="base" latinLnBrk="0" hangingPunct="0">
+              <a:lnSpc>
+                <a:spcPct val="100000"/>
+              </a:lnSpc>
+              <a:spcBef>
+                <a:spcPct val="0"/>
+              </a:spcBef>
+              <a:spcAft>
+                <a:spcPct val="0"/>
+              </a:spcAft>
+              <a:buClrTx/>
+              <a:buSzTx/>
+              <a:buFontTx/>
+              <a:buChar char="•"/>
+              <a:tabLst/>
             </a:pPr>
             <a:r>
-              <a:rPr lang="en-US" sz="1200" dirty="0">
-                <a:latin typeface="Lato" panose="020F0502020204030203" pitchFamily="34" charset="0"/>
-                <a:ea typeface="Calibri" pitchFamily="34" charset="-122"/>
-                <a:cs typeface="Arial" panose="020B0604020202020204" pitchFamily="34" charset="0"/>
-              </a:rPr>
-              <a:t>Power Query Transformation: Demonstrates the before/after of data cleaning — raw price column (“45 Lac”, “1.47 Crore”) converted to numeric Lakhs, and areaWithType column parsed to extract carpet sqft as a clean number.</a:t>
-            </a:r>
-            <a:endParaRPr lang="en-US" sz="1200" dirty="0">
-              <a:latin typeface="Lato" panose="020F0502020204030203" pitchFamily="34" charset="0"/>
-              <a:cs typeface="Arial" panose="020B0604020202020204" pitchFamily="34" charset="0"/>
-            </a:endParaRPr>
+              <a:rPr kumimoji="0" lang="en-US" altLang="en-US" sz="1000" b="1" i="0" u="none" strike="noStrike" cap="none" normalizeH="0" baseline="0" dirty="0">
+                <a:ln>
+                  <a:noFill/>
+                </a:ln>
+                <a:solidFill>
+                  <a:schemeClr val="tx1"/>
+                </a:solidFill>
+                <a:effectLst/>
+                <a:latin typeface="Times New Roman" panose="02020603050405020304" pitchFamily="18" charset="0"/>
+                <a:cs typeface="Times New Roman" panose="02020603050405020304" pitchFamily="18" charset="0"/>
+              </a:rPr>
+              <a:t>Value Discovery Scatter Plot:</a:t>
+            </a:r>
+            <a:r>
+              <a:rPr kumimoji="0" lang="en-US" altLang="en-US" sz="1000" b="0" i="0" u="none" strike="noStrike" cap="none" normalizeH="0" baseline="0" dirty="0">
+                <a:ln>
+                  <a:noFill/>
+                </a:ln>
+                <a:solidFill>
+                  <a:schemeClr val="tx1"/>
+                </a:solidFill>
+                <a:effectLst/>
+                <a:latin typeface="Times New Roman" panose="02020603050405020304" pitchFamily="18" charset="0"/>
+                <a:cs typeface="Times New Roman" panose="02020603050405020304" pitchFamily="18" charset="0"/>
+              </a:rPr>
+              <a:t> A high-density visual that plots every property by Area vs. Price. By color-coding markers (BHK Type / Deal Status), users can instantly spot anomalies—such as a large 3BHK priced significantly lower than the sector trend.</a:t>
+            </a:r>
+          </a:p>
+          <a:p>
+            <a:pPr marL="0" marR="0" lvl="0" indent="0" algn="l" defTabSz="914400" rtl="0" eaLnBrk="0" fontAlgn="base" latinLnBrk="0" hangingPunct="0">
+              <a:lnSpc>
+                <a:spcPct val="100000"/>
+              </a:lnSpc>
+              <a:spcBef>
+                <a:spcPct val="0"/>
+              </a:spcBef>
+              <a:spcAft>
+                <a:spcPct val="0"/>
+              </a:spcAft>
+              <a:buClrTx/>
+              <a:buSzTx/>
+              <a:buFontTx/>
+              <a:buChar char="•"/>
+              <a:tabLst/>
+            </a:pPr>
+            <a:r>
+              <a:rPr kumimoji="0" lang="en-US" altLang="en-US" sz="1000" b="1" i="0" u="none" strike="noStrike" cap="none" normalizeH="0" baseline="0" dirty="0">
+                <a:ln>
+                  <a:noFill/>
+                </a:ln>
+                <a:solidFill>
+                  <a:schemeClr val="tx1"/>
+                </a:solidFill>
+                <a:effectLst/>
+                <a:latin typeface="Times New Roman" panose="02020603050405020304" pitchFamily="18" charset="0"/>
+                <a:cs typeface="Times New Roman" panose="02020603050405020304" pitchFamily="18" charset="0"/>
+              </a:rPr>
+              <a:t>The Sector × BHK Matrix:</a:t>
+            </a:r>
+            <a:r>
+              <a:rPr kumimoji="0" lang="en-US" altLang="en-US" sz="1000" b="0" i="0" u="none" strike="noStrike" cap="none" normalizeH="0" baseline="0" dirty="0">
+                <a:ln>
+                  <a:noFill/>
+                </a:ln>
+                <a:solidFill>
+                  <a:schemeClr val="tx1"/>
+                </a:solidFill>
+                <a:effectLst/>
+                <a:latin typeface="Times New Roman" panose="02020603050405020304" pitchFamily="18" charset="0"/>
+                <a:cs typeface="Times New Roman" panose="02020603050405020304" pitchFamily="18" charset="0"/>
+              </a:rPr>
+              <a:t> An interactive lookup table that acts as a "Market Price Index." It allows a user to identify the exact average price for a 2BHK in any specific sector (e.g., Sector 54) without browsing individual listings.</a:t>
+            </a:r>
+          </a:p>
+        </p:txBody>
+      </p:sp>
+      <p:sp>
+        <p:nvSpPr>
+          <p:cNvPr id="22" name="Rectangle 4">
+            <a:extLst>
+              <a:ext uri="{FF2B5EF4-FFF2-40B4-BE49-F238E27FC236}">
+                <a16:creationId xmlns:a16="http://schemas.microsoft.com/office/drawing/2014/main" id="{8907C702-B0FE-793E-43BC-2BC35197B2BD}"/>
+              </a:ext>
+            </a:extLst>
+          </p:cNvPr>
+          <p:cNvSpPr>
+            <a:spLocks noChangeArrowheads="1"/>
+          </p:cNvSpPr>
+          <p:nvPr/>
+        </p:nvSpPr>
+        <p:spPr bwMode="auto">
+          <a:xfrm>
+            <a:off x="6200285" y="2825282"/>
+            <a:ext cx="2669395" cy="1938992"/>
+          </a:xfrm>
+          <a:prstGeom prst="rect">
+            <a:avLst/>
+          </a:prstGeom>
+          <a:noFill/>
+          <a:ln>
+            <a:noFill/>
+          </a:ln>
+          <a:effectLst/>
+          <a:extLst>
+            <a:ext uri="{909E8E84-426E-40DD-AFC4-6F175D3DCCD1}">
+              <a14:hiddenFill xmlns:a14="http://schemas.microsoft.com/office/drawing/2010/main">
+                <a:solidFill>
+                  <a:schemeClr val="accent1"/>
+                </a:solidFill>
+              </a14:hiddenFill>
+            </a:ext>
+            <a:ext uri="{91240B29-F687-4F45-9708-019B960494DF}">
+              <a14:hiddenLine xmlns:a14="http://schemas.microsoft.com/office/drawing/2010/main" w="9525">
+                <a:solidFill>
+                  <a:schemeClr val="tx1"/>
+                </a:solidFill>
+                <a:miter lim="800000"/>
+                <a:headEnd/>
+                <a:tailEnd/>
+              </a14:hiddenLine>
+            </a:ext>
+            <a:ext uri="{AF507438-7753-43E0-B8FC-AC1667EBCBE1}">
+              <a14:hiddenEffects xmlns:a14="http://schemas.microsoft.com/office/drawing/2010/main">
+                <a:effectLst>
+                  <a:outerShdw dist="35921" dir="2700000" algn="ctr" rotWithShape="0">
+                    <a:schemeClr val="bg2"/>
+                  </a:outerShdw>
+                </a:effectLst>
+              </a14:hiddenEffects>
+            </a:ext>
+          </a:extLst>
+        </p:spPr>
+        <p:txBody>
+          <a:bodyPr vert="horz" wrap="square" lIns="91440" tIns="45720" rIns="91440" bIns="45720" numCol="1" anchor="ctr" anchorCtr="0" compatLnSpc="1">
+            <a:prstTxWarp prst="textNoShape">
+              <a:avLst/>
+            </a:prstTxWarp>
+            <a:spAutoFit/>
+          </a:bodyPr>
+          <a:lstStyle/>
+          <a:p>
+            <a:pPr marL="0" marR="0" lvl="0" indent="0" algn="l" defTabSz="914400" rtl="0" eaLnBrk="0" fontAlgn="base" latinLnBrk="0" hangingPunct="0">
+              <a:lnSpc>
+                <a:spcPct val="100000"/>
+              </a:lnSpc>
+              <a:spcBef>
+                <a:spcPct val="0"/>
+              </a:spcBef>
+              <a:spcAft>
+                <a:spcPct val="0"/>
+              </a:spcAft>
+              <a:buClrTx/>
+              <a:buSzTx/>
+              <a:buFontTx/>
+              <a:buChar char="•"/>
+              <a:tabLst/>
+            </a:pPr>
+            <a:r>
+              <a:rPr kumimoji="0" lang="en-US" altLang="en-US" sz="1000" b="1" i="0" u="none" strike="noStrike" cap="none" normalizeH="0" baseline="0" dirty="0">
+                <a:ln>
+                  <a:noFill/>
+                </a:ln>
+                <a:solidFill>
+                  <a:schemeClr val="tx1"/>
+                </a:solidFill>
+                <a:effectLst/>
+                <a:latin typeface="Times New Roman" panose="02020603050405020304" pitchFamily="18" charset="0"/>
+                <a:cs typeface="Times New Roman" panose="02020603050405020304" pitchFamily="18" charset="0"/>
+              </a:rPr>
+              <a:t>Currency Normalization:</a:t>
+            </a:r>
+            <a:r>
+              <a:rPr kumimoji="0" lang="en-US" altLang="en-US" sz="1000" b="0" i="0" u="none" strike="noStrike" cap="none" normalizeH="0" baseline="0" dirty="0">
+                <a:ln>
+                  <a:noFill/>
+                </a:ln>
+                <a:solidFill>
+                  <a:schemeClr val="tx1"/>
+                </a:solidFill>
+                <a:effectLst/>
+                <a:latin typeface="Times New Roman" panose="02020603050405020304" pitchFamily="18" charset="0"/>
+                <a:cs typeface="Times New Roman" panose="02020603050405020304" pitchFamily="18" charset="0"/>
+              </a:rPr>
+              <a:t> Demonstrates the logic used to unify "Lakhs" and "Crore" notations into a single numeric field, enabling mathematical summation and averaging.</a:t>
+            </a:r>
+          </a:p>
+          <a:p>
+            <a:pPr marL="0" marR="0" lvl="0" indent="0" algn="l" defTabSz="914400" rtl="0" eaLnBrk="0" fontAlgn="base" latinLnBrk="0" hangingPunct="0">
+              <a:lnSpc>
+                <a:spcPct val="100000"/>
+              </a:lnSpc>
+              <a:spcBef>
+                <a:spcPct val="0"/>
+              </a:spcBef>
+              <a:spcAft>
+                <a:spcPct val="0"/>
+              </a:spcAft>
+              <a:buClrTx/>
+              <a:buSzTx/>
+              <a:buFontTx/>
+              <a:buChar char="•"/>
+              <a:tabLst/>
+            </a:pPr>
+            <a:r>
+              <a:rPr kumimoji="0" lang="en-US" altLang="en-US" sz="1000" b="1" i="0" u="none" strike="noStrike" cap="none" normalizeH="0" baseline="0" dirty="0">
+                <a:ln>
+                  <a:noFill/>
+                </a:ln>
+                <a:solidFill>
+                  <a:schemeClr val="tx1"/>
+                </a:solidFill>
+                <a:effectLst/>
+                <a:latin typeface="Times New Roman" panose="02020603050405020304" pitchFamily="18" charset="0"/>
+                <a:cs typeface="Times New Roman" panose="02020603050405020304" pitchFamily="18" charset="0"/>
+              </a:rPr>
+              <a:t>Attribute Parsing:</a:t>
+            </a:r>
+            <a:r>
+              <a:rPr kumimoji="0" lang="en-US" altLang="en-US" sz="1000" b="0" i="0" u="none" strike="noStrike" cap="none" normalizeH="0" baseline="0" dirty="0">
+                <a:ln>
+                  <a:noFill/>
+                </a:ln>
+                <a:solidFill>
+                  <a:schemeClr val="tx1"/>
+                </a:solidFill>
+                <a:effectLst/>
+                <a:latin typeface="Times New Roman" panose="02020603050405020304" pitchFamily="18" charset="0"/>
+                <a:cs typeface="Times New Roman" panose="02020603050405020304" pitchFamily="18" charset="0"/>
+              </a:rPr>
+              <a:t> Shows how complex text strings in the </a:t>
+            </a:r>
+            <a:r>
+              <a:rPr kumimoji="0" lang="en-US" altLang="en-US" sz="1000" b="0" i="0" u="none" strike="noStrike" cap="none" normalizeH="0" baseline="0" dirty="0" err="1">
+                <a:ln>
+                  <a:noFill/>
+                </a:ln>
+                <a:solidFill>
+                  <a:schemeClr val="tx1"/>
+                </a:solidFill>
+                <a:effectLst/>
+                <a:latin typeface="Times New Roman" panose="02020603050405020304" pitchFamily="18" charset="0"/>
+                <a:cs typeface="Times New Roman" panose="02020603050405020304" pitchFamily="18" charset="0"/>
+              </a:rPr>
+              <a:t>areaWithType</a:t>
+            </a:r>
+            <a:r>
+              <a:rPr kumimoji="0" lang="en-US" altLang="en-US" sz="1000" b="0" i="0" u="none" strike="noStrike" cap="none" normalizeH="0" baseline="0" dirty="0">
+                <a:ln>
+                  <a:noFill/>
+                </a:ln>
+                <a:solidFill>
+                  <a:schemeClr val="tx1"/>
+                </a:solidFill>
+                <a:effectLst/>
+                <a:latin typeface="Times New Roman" panose="02020603050405020304" pitchFamily="18" charset="0"/>
+                <a:cs typeface="Times New Roman" panose="02020603050405020304" pitchFamily="18" charset="0"/>
+              </a:rPr>
+              <a:t> and Configuration columns were parsed to extract clean, numeric values for "Carpet Area" and "BHK Count."</a:t>
+            </a:r>
+          </a:p>
+          <a:p>
+            <a:pPr marL="0" marR="0" lvl="0" indent="0" algn="l" defTabSz="914400" rtl="0" eaLnBrk="0" fontAlgn="base" latinLnBrk="0" hangingPunct="0">
+              <a:lnSpc>
+                <a:spcPct val="100000"/>
+              </a:lnSpc>
+              <a:spcBef>
+                <a:spcPct val="0"/>
+              </a:spcBef>
+              <a:spcAft>
+                <a:spcPct val="0"/>
+              </a:spcAft>
+              <a:buClrTx/>
+              <a:buSzTx/>
+              <a:buFontTx/>
+              <a:buChar char="•"/>
+              <a:tabLst/>
+            </a:pPr>
+            <a:r>
+              <a:rPr kumimoji="0" lang="en-US" altLang="en-US" sz="1000" b="1" i="0" u="none" strike="noStrike" cap="none" normalizeH="0" baseline="0" dirty="0">
+                <a:ln>
+                  <a:noFill/>
+                </a:ln>
+                <a:solidFill>
+                  <a:schemeClr val="tx1"/>
+                </a:solidFill>
+                <a:effectLst/>
+                <a:latin typeface="Times New Roman" panose="02020603050405020304" pitchFamily="18" charset="0"/>
+                <a:cs typeface="Times New Roman" panose="02020603050405020304" pitchFamily="18" charset="0"/>
+              </a:rPr>
+              <a:t>Result:</a:t>
+            </a:r>
+            <a:r>
+              <a:rPr kumimoji="0" lang="en-US" altLang="en-US" sz="1000" b="0" i="0" u="none" strike="noStrike" cap="none" normalizeH="0" baseline="0" dirty="0">
+                <a:ln>
+                  <a:noFill/>
+                </a:ln>
+                <a:solidFill>
+                  <a:schemeClr val="tx1"/>
+                </a:solidFill>
+                <a:effectLst/>
+                <a:latin typeface="Times New Roman" panose="02020603050405020304" pitchFamily="18" charset="0"/>
+                <a:cs typeface="Times New Roman" panose="02020603050405020304" pitchFamily="18" charset="0"/>
+              </a:rPr>
+              <a:t> This transformation process turns thousands of inconsistent text entries into a high-performance data model ready for real-time query and visualization.</a:t>
+            </a:r>
           </a:p>
         </p:txBody>
       </p:sp>
@@ -7387,10 +8259,10 @@
       </p:grpSpPr>
       <p:pic>
         <p:nvPicPr>
-          <p:cNvPr id="3" name="Picture 2">
+          <p:cNvPr id="4" name="Picture 3">
             <a:extLst>
               <a:ext uri="{FF2B5EF4-FFF2-40B4-BE49-F238E27FC236}">
-                <a16:creationId xmlns:a16="http://schemas.microsoft.com/office/drawing/2014/main" id="{1CE15A3D-2AF3-7C82-23E0-4CC6FE0A3E8C}"/>
+                <a16:creationId xmlns:a16="http://schemas.microsoft.com/office/drawing/2014/main" id="{15F404B0-9853-F6EA-B66C-4525E60F6E6F}"/>
               </a:ext>
             </a:extLst>
           </p:cNvPr>
@@ -7407,8 +8279,8 @@
         </p:blipFill>
         <p:spPr>
           <a:xfrm>
-            <a:off x="1113393" y="644353"/>
-            <a:ext cx="6917214" cy="3854794"/>
+            <a:off x="636814" y="495980"/>
+            <a:ext cx="7870371" cy="4427084"/>
           </a:xfrm>
           <a:prstGeom prst="rect">
             <a:avLst/>
@@ -7447,10 +8319,10 @@
       </p:grpSpPr>
       <p:pic>
         <p:nvPicPr>
-          <p:cNvPr id="3" name="Picture 2">
+          <p:cNvPr id="4" name="Picture 3">
             <a:extLst>
               <a:ext uri="{FF2B5EF4-FFF2-40B4-BE49-F238E27FC236}">
-                <a16:creationId xmlns:a16="http://schemas.microsoft.com/office/drawing/2014/main" id="{DBB97606-2DBC-2FC7-73F4-55BE8D3CBF2F}"/>
+                <a16:creationId xmlns:a16="http://schemas.microsoft.com/office/drawing/2014/main" id="{D254250C-EE98-E38D-5848-AC6E5A0188EA}"/>
               </a:ext>
             </a:extLst>
           </p:cNvPr>
@@ -7467,8 +8339,8 @@
         </p:blipFill>
         <p:spPr>
           <a:xfrm>
-            <a:off x="708022" y="529907"/>
-            <a:ext cx="7727955" cy="4361004"/>
+            <a:off x="518432" y="452608"/>
+            <a:ext cx="8107136" cy="4560264"/>
           </a:xfrm>
           <a:prstGeom prst="rect">
             <a:avLst/>
@@ -7521,12 +8393,6 @@
 </file>
 
 <file path=ppt/tags/tag14.xml><?xml version="1.0" encoding="utf-8"?>
-<p:tagLst xmlns:a="http://schemas.openxmlformats.org/drawingml/2006/main" xmlns:r="http://schemas.openxmlformats.org/officeDocument/2006/relationships" xmlns:p="http://schemas.openxmlformats.org/presentationml/2006/main">
-  <p:tag name="ARTICULATE_SLIDE_THUMBNAIL_REFRESH" val="1"/>
-</p:tagLst>
-</file>
-
-<file path=ppt/tags/tag15.xml><?xml version="1.0" encoding="utf-8"?>
 <p:tagLst xmlns:a="http://schemas.openxmlformats.org/drawingml/2006/main" xmlns:r="http://schemas.openxmlformats.org/officeDocument/2006/relationships" xmlns:p="http://schemas.openxmlformats.org/presentationml/2006/main">
   <p:tag name="ARTICULATE_SLIDE_THUMBNAIL_REFRESH" val="1"/>
 </p:tagLst>
